--- a/share/SIH2026-A0H-T-052-SIH26131_Presentation.pptx
+++ b/share/SIH2026-A0H-T-052-SIH26131_Presentation.pptx
@@ -10,7 +10,7 @@
   <p:sldIdLst>
     <p:sldId id="291" r:id="rId2"/>
     <p:sldId id="281" r:id="rId3"/>
-    <p:sldId id="290" r:id="rId4"/>
+    <p:sldId id="297" r:id="rId4"/>
     <p:sldId id="293" r:id="rId5"/>
     <p:sldId id="258" r:id="rId6"/>
     <p:sldId id="296" r:id="rId7"/>
@@ -261,7 +261,7 @@
             <a:fld id="{C4D5ADD5-2BBC-4A94-8F86-D9013941F742}" type="datetimeFigureOut">
               <a:rPr lang="en-US"/>
               <a:pPr/>
-              <a:t>9/14/2026</a:t>
+              <a:t>9/20/2026</a:t>
             </a:fld>
             <a:endParaRPr lang="en-US"/>
           </a:p>
@@ -1356,7 +1356,7 @@
           <a:p>
             <a:fld id="{E60792E3-D524-454C-8AFD-A91972900BCB}" type="datetime1">
               <a:rPr lang="en-US" smtClean="0"/>
-              <a:t>9/14/2026</a:t>
+              <a:t>9/20/2026</a:t>
             </a:fld>
             <a:endParaRPr lang="en-US"/>
           </a:p>
@@ -1538,7 +1538,7 @@
           <a:p>
             <a:fld id="{053C3A68-6922-42D3-8905-ECC2D82A3469}" type="datetime1">
               <a:rPr lang="en-US" smtClean="0"/>
-              <a:t>9/14/2026</a:t>
+              <a:t>9/20/2026</a:t>
             </a:fld>
             <a:endParaRPr lang="en-US"/>
           </a:p>
@@ -1730,7 +1730,7 @@
           <a:p>
             <a:fld id="{CB69E9F4-7604-4950-A8B2-8ACDEDB1506E}" type="datetime1">
               <a:rPr lang="en-US" smtClean="0"/>
-              <a:t>9/14/2026</a:t>
+              <a:t>9/20/2026</a:t>
             </a:fld>
             <a:endParaRPr lang="en-US"/>
           </a:p>
@@ -1912,7 +1912,7 @@
           <a:p>
             <a:fld id="{708B7524-32A2-4C20-A58C-BC3BAA1042FC}" type="datetime1">
               <a:rPr lang="en-US" smtClean="0"/>
-              <a:t>9/14/2026</a:t>
+              <a:t>9/20/2026</a:t>
             </a:fld>
             <a:endParaRPr lang="en-US"/>
           </a:p>
@@ -2171,7 +2171,7 @@
           <a:p>
             <a:fld id="{1E994447-D6B2-43BB-A877-57F1A267B999}" type="datetime1">
               <a:rPr lang="en-US" smtClean="0"/>
-              <a:t>9/14/2026</a:t>
+              <a:t>9/20/2026</a:t>
             </a:fld>
             <a:endParaRPr lang="en-US"/>
           </a:p>
@@ -2470,7 +2470,7 @@
           <a:p>
             <a:fld id="{68920E16-BD35-483C-AA6B-346FC7E46DEA}" type="datetime1">
               <a:rPr lang="en-US" smtClean="0"/>
-              <a:t>9/14/2026</a:t>
+              <a:t>9/20/2026</a:t>
             </a:fld>
             <a:endParaRPr lang="en-US"/>
           </a:p>
@@ -2903,7 +2903,7 @@
           <a:p>
             <a:fld id="{2FEAC6F8-5103-4FC0-A69E-5C6AE6469DA8}" type="datetime1">
               <a:rPr lang="en-US" smtClean="0"/>
-              <a:t>9/14/2026</a:t>
+              <a:t>9/20/2026</a:t>
             </a:fld>
             <a:endParaRPr lang="en-US"/>
           </a:p>
@@ -3034,7 +3034,7 @@
           <a:p>
             <a:fld id="{C60C6921-0627-4C8F-83D5-0CF936D2FFDD}" type="datetime1">
               <a:rPr lang="en-US" smtClean="0"/>
-              <a:t>9/14/2026</a:t>
+              <a:t>9/20/2026</a:t>
             </a:fld>
             <a:endParaRPr lang="en-US"/>
           </a:p>
@@ -3143,7 +3143,7 @@
           <a:p>
             <a:fld id="{2FF08AD7-8103-40F8-983C-E2BA6BB9CBE0}" type="datetime1">
               <a:rPr lang="en-US" smtClean="0"/>
-              <a:t>9/14/2026</a:t>
+              <a:t>9/20/2026</a:t>
             </a:fld>
             <a:endParaRPr lang="en-US"/>
           </a:p>
@@ -3432,7 +3432,7 @@
           <a:p>
             <a:fld id="{DF8C06B4-9380-4A4D-AF49-A3596E17DAF5}" type="datetime1">
               <a:rPr lang="en-US" smtClean="0"/>
-              <a:t>9/14/2026</a:t>
+              <a:t>9/20/2026</a:t>
             </a:fld>
             <a:endParaRPr lang="en-US"/>
           </a:p>
@@ -3701,7 +3701,7 @@
           <a:p>
             <a:fld id="{EF7FDEF1-C582-4E22-9E77-D68326471F28}" type="datetime1">
               <a:rPr lang="en-US" smtClean="0"/>
-              <a:t>9/14/2026</a:t>
+              <a:t>9/20/2026</a:t>
             </a:fld>
             <a:endParaRPr lang="en-US"/>
           </a:p>
@@ -3944,7 +3944,7 @@
           <a:p>
             <a:fld id="{780A9602-A9A9-453F-AEF1-37B5837E02CD}" type="datetime1">
               <a:rPr lang="en-US" smtClean="0"/>
-              <a:t>9/14/2026</a:t>
+              <a:t>9/20/2026</a:t>
             </a:fld>
             <a:endParaRPr lang="en-US"/>
           </a:p>
@@ -6833,277 +6833,1784 @@
       </p:pic>
       <p:sp>
         <p:nvSpPr>
-          <p:cNvPr id="3" name="TextBox 2">
-            <a:extLst>
-              <a:ext uri="{FF2B5EF4-FFF2-40B4-BE49-F238E27FC236}">
-                <a16:creationId xmlns:a16="http://schemas.microsoft.com/office/drawing/2014/main" id="{DE94C5E1-8D77-F01F-8E18-82BE7DC417AA}"/>
-              </a:ext>
-            </a:extLst>
-          </p:cNvPr>
-          <p:cNvSpPr txBox="1"/>
+          <p:cNvPr id="101" name="Header 101"/>
+          <p:cNvSpPr/>
           <p:nvPr/>
         </p:nvSpPr>
         <p:spPr>
           <a:xfrm>
-            <a:off x="500743" y="1359451"/>
-            <a:ext cx="6096000" cy="3693319"/>
-          </a:xfrm>
-          <a:prstGeom prst="rect">
+            <a:off x="500000" y="1300000"/>
+            <a:ext cx="2600000" cy="340000"/>
+          </a:xfrm>
+          <a:prstGeom prst="roundRect">
+            <a:avLst>
+              <a:gd name="adj" fmla="val 50000"/>
+            </a:avLst>
+          </a:prstGeom>
+          <a:solidFill>
+            <a:srgbClr val="1B5E20"/>
+          </a:solidFill>
+          <a:ln>
+            <a:noFill/>
+          </a:ln>
+        </p:spPr>
+        <p:txBody>
+          <a:bodyPr wrap="square" lIns="91440" tIns="45720" rIns="91440" bIns="45720" rtlCol="0" anchor="ctr">
+            <a:noAutofit/>
+          </a:bodyPr>
+          <a:lstStyle/>
+          <a:p>
+            <a:pPr algn="ctr">
+              <a:spcBef>
+                <a:spcPts val="0"/>
+              </a:spcBef>
+              <a:spcAft>
+                <a:spcPts val="0"/>
+              </a:spcAft>
+              <a:buNone/>
+            </a:pPr>
+            <a:r>
+              <a:rPr lang="en-IN" sz="1500" b="1" dirty="0">
+                <a:solidFill>
+                  <a:srgbClr val="FFFFFF"/>
+                </a:solidFill>
+              </a:rPr>
+              <a:t>Technologies Used</a:t>
+            </a:r>
+          </a:p>
+        </p:txBody>
+      </p:sp>
+      <p:sp>
+        <p:nvSpPr>
+          <p:cNvPr id="102" name="Card 102"/>
+          <p:cNvSpPr/>
+          <p:nvPr/>
+        </p:nvSpPr>
+        <p:spPr>
+          <a:xfrm>
+            <a:off x="500000" y="1720000"/>
+            <a:ext cx="3200000" cy="950000"/>
+          </a:xfrm>
+          <a:prstGeom prst="roundRect">
+            <a:avLst>
+              <a:gd name="adj" fmla="val 10000"/>
+            </a:avLst>
+          </a:prstGeom>
+          <a:solidFill>
+            <a:srgbClr val="E8F5E9"/>
+          </a:solidFill>
+          <a:ln w="12700">
+            <a:solidFill>
+              <a:srgbClr val="A5D6A7"/>
+            </a:solidFill>
+          </a:ln>
+        </p:spPr>
+        <p:txBody>
+          <a:bodyPr wrap="square" lIns="760000" tIns="45720" rIns="90000" bIns="45720" rtlCol="0" anchor="ctr">
+            <a:noAutofit/>
+          </a:bodyPr>
+          <a:lstStyle/>
+          <a:p>
+            <a:pPr algn="l">
+              <a:spcBef>
+                <a:spcPts val="0"/>
+              </a:spcBef>
+              <a:spcAft>
+                <a:spcPts val="200"/>
+              </a:spcAft>
+              <a:buNone/>
+            </a:pPr>
+            <a:r>
+              <a:rPr lang="en-IN" sz="1300" b="1" dirty="0">
+                <a:solidFill>
+                  <a:srgbClr val="1B5E20"/>
+                </a:solidFill>
+              </a:rPr>
+              <a:t>AI &amp; Deep Learning</a:t>
+            </a:r>
+          </a:p>
+          <a:p>
+            <a:pPr algn="l">
+              <a:spcBef>
+                <a:spcPts val="0"/>
+              </a:spcBef>
+              <a:spcAft>
+                <a:spcPts val="0"/>
+              </a:spcAft>
+              <a:buNone/>
+            </a:pPr>
+            <a:r>
+              <a:rPr lang="en-IN" sz="1100" b="0" dirty="0">
+                <a:solidFill>
+                  <a:srgbClr val="2B2B2B"/>
+                </a:solidFill>
+              </a:rPr>
+              <a:t>CNN/YOLO models for crop disease and pest identification</a:t>
+            </a:r>
+          </a:p>
+        </p:txBody>
+      </p:sp>
+      <p:sp>
+        <p:nvSpPr>
+          <p:cNvPr id="103" name="Icon 103"/>
+          <p:cNvSpPr/>
+          <p:nvPr/>
+        </p:nvSpPr>
+        <p:spPr>
+          <a:xfrm>
+            <a:off x="630000" y="1935000"/>
+            <a:ext cx="520000" cy="520000"/>
+          </a:xfrm>
+          <a:prstGeom prst="ellipse">
             <a:avLst/>
           </a:prstGeom>
-          <a:noFill/>
-        </p:spPr>
-        <p:txBody>
-          <a:bodyPr wrap="square">
-            <a:spAutoFit/>
+          <a:solidFill>
+            <a:srgbClr val="FFFFFF"/>
+          </a:solidFill>
+          <a:ln w="19050">
+            <a:solidFill>
+              <a:srgbClr val="2E7D32"/>
+            </a:solidFill>
+          </a:ln>
+        </p:spPr>
+        <p:txBody>
+          <a:bodyPr wrap="square" lIns="0" tIns="0" rIns="0" bIns="0" rtlCol="0" anchor="ctr">
+            <a:noAutofit/>
           </a:bodyPr>
           <a:lstStyle/>
           <a:p>
-            <a:pPr>
+            <a:pPr algn="ctr">
+              <a:spcBef>
+                <a:spcPts val="0"/>
+              </a:spcBef>
+              <a:spcAft>
+                <a:spcPts val="0"/>
+              </a:spcAft>
               <a:buNone/>
             </a:pPr>
             <a:r>
-              <a:rPr lang="en-IN" sz="2000" b="1" dirty="0"/>
-              <a:t>Technologies Used</a:t>
-            </a:r>
-          </a:p>
-          <a:p>
-            <a:pPr marL="342900" lvl="0" indent="-342900">
-              <a:buFont typeface="Arial" panose="020B0604020202020204" pitchFamily="34" charset="0"/>
-              <a:buChar char="•"/>
+              <a:rPr lang="en-IN" sz="1600" b="0" dirty="0">
+                <a:solidFill>
+                  <a:srgbClr val="2B2B2B"/>
+                </a:solidFill>
+              </a:rPr>
+              <a:t>🤖</a:t>
+            </a:r>
+          </a:p>
+        </p:txBody>
+      </p:sp>
+      <p:sp>
+        <p:nvSpPr>
+          <p:cNvPr id="104" name="Card 104"/>
+          <p:cNvSpPr/>
+          <p:nvPr/>
+        </p:nvSpPr>
+        <p:spPr>
+          <a:xfrm>
+            <a:off x="3900000" y="1720000"/>
+            <a:ext cx="3200000" cy="950000"/>
+          </a:xfrm>
+          <a:prstGeom prst="roundRect">
+            <a:avLst>
+              <a:gd name="adj" fmla="val 10000"/>
+            </a:avLst>
+          </a:prstGeom>
+          <a:solidFill>
+            <a:srgbClr val="E8F5E9"/>
+          </a:solidFill>
+          <a:ln w="12700">
+            <a:solidFill>
+              <a:srgbClr val="A5D6A7"/>
+            </a:solidFill>
+          </a:ln>
+        </p:spPr>
+        <p:txBody>
+          <a:bodyPr wrap="square" lIns="760000" tIns="45720" rIns="90000" bIns="45720" rtlCol="0" anchor="ctr">
+            <a:noAutofit/>
+          </a:bodyPr>
+          <a:lstStyle/>
+          <a:p>
+            <a:pPr algn="l">
+              <a:spcBef>
+                <a:spcPts val="0"/>
+              </a:spcBef>
+              <a:spcAft>
+                <a:spcPts val="200"/>
+              </a:spcAft>
+              <a:buNone/>
             </a:pPr>
             <a:r>
-              <a:rPr lang="en-IN" b="1" dirty="0"/>
-              <a:t>AI &amp; Deep Learning:</a:t>
-            </a:r>
-            <a:r>
-              <a:rPr lang="en-IN" dirty="0"/>
-              <a:t> CNN/YOLO models for crop disease and pest identification </a:t>
-            </a:r>
-          </a:p>
-          <a:p>
-            <a:pPr marL="342900" lvl="0" indent="-342900">
-              <a:buFont typeface="Arial" panose="020B0604020202020204" pitchFamily="34" charset="0"/>
-              <a:buChar char="•"/>
+              <a:rPr lang="en-IN" sz="1300" b="1" dirty="0">
+                <a:solidFill>
+                  <a:srgbClr val="1B5E20"/>
+                </a:solidFill>
+              </a:rPr>
+              <a:t>Computer Vision</a:t>
+            </a:r>
+          </a:p>
+          <a:p>
+            <a:pPr algn="l">
+              <a:spcBef>
+                <a:spcPts val="0"/>
+              </a:spcBef>
+              <a:spcAft>
+                <a:spcPts val="0"/>
+              </a:spcAft>
+              <a:buNone/>
             </a:pPr>
             <a:r>
-              <a:rPr lang="en-IN" b="1" dirty="0"/>
-              <a:t>Computer Vision:</a:t>
-            </a:r>
-            <a:r>
-              <a:rPr lang="en-IN" dirty="0"/>
-              <a:t> Image-based analysis of infected leaves and crops </a:t>
-            </a:r>
-          </a:p>
-          <a:p>
-            <a:pPr marL="342900" lvl="0" indent="-342900">
-              <a:buFont typeface="Arial" panose="020B0604020202020204" pitchFamily="34" charset="0"/>
-              <a:buChar char="•"/>
-            </a:pPr>
-            <a:r>
-              <a:rPr lang="en-IN" b="1" dirty="0"/>
-              <a:t>Machine Learning:</a:t>
-            </a:r>
-            <a:r>
-              <a:rPr lang="en-IN" dirty="0"/>
-              <a:t> Disease prediction using environmental and crop data </a:t>
-            </a:r>
-          </a:p>
-          <a:p>
-            <a:pPr marL="342900" lvl="0" indent="-342900">
-              <a:buFont typeface="Arial" panose="020B0604020202020204" pitchFamily="34" charset="0"/>
-              <a:buChar char="•"/>
-            </a:pPr>
-            <a:r>
-              <a:rPr lang="en-IN" b="1" dirty="0"/>
-              <a:t>IoT Sensors:</a:t>
-            </a:r>
-            <a:r>
-              <a:rPr lang="en-IN" dirty="0"/>
-              <a:t> Monitoring temperature, humidity, soil moisture, and weather conditions </a:t>
-            </a:r>
-          </a:p>
-          <a:p>
-            <a:pPr marL="342900" lvl="0" indent="-342900">
-              <a:buFont typeface="Arial" panose="020B0604020202020204" pitchFamily="34" charset="0"/>
-              <a:buChar char="•"/>
-            </a:pPr>
-            <a:r>
-              <a:rPr lang="en-IN" b="1" dirty="0"/>
-              <a:t>Cloud Platform:</a:t>
-            </a:r>
-            <a:r>
-              <a:rPr lang="en-IN" dirty="0"/>
-              <a:t> Data storage, model training, and real-time recommendations </a:t>
-            </a:r>
-          </a:p>
-          <a:p>
-            <a:pPr marL="342900" lvl="0" indent="-342900">
-              <a:buFont typeface="Arial" panose="020B0604020202020204" pitchFamily="34" charset="0"/>
-              <a:buChar char="•"/>
-            </a:pPr>
-            <a:r>
-              <a:rPr lang="en-IN" b="1" dirty="0"/>
-              <a:t>Mobile Application:</a:t>
-            </a:r>
-            <a:r>
-              <a:rPr lang="en-IN" dirty="0"/>
-              <a:t> Farmer-friendly interface for disease scanning and alerts</a:t>
-            </a:r>
-          </a:p>
-        </p:txBody>
-      </p:sp>
-      <p:sp>
-        <p:nvSpPr>
-          <p:cNvPr id="4" name="TextBox 3">
-            <a:extLst>
-              <a:ext uri="{FF2B5EF4-FFF2-40B4-BE49-F238E27FC236}">
-                <a16:creationId xmlns:a16="http://schemas.microsoft.com/office/drawing/2014/main" id="{CB6BF727-F56C-A632-25B5-7C8A2A5C60E8}"/>
-              </a:ext>
-            </a:extLst>
-          </p:cNvPr>
-          <p:cNvSpPr txBox="1"/>
+              <a:rPr lang="en-IN" sz="1100" b="0" dirty="0">
+                <a:solidFill>
+                  <a:srgbClr val="2B2B2B"/>
+                </a:solidFill>
+              </a:rPr>
+              <a:t>Image-based analysis of infected leaves and crops</a:t>
+            </a:r>
+          </a:p>
+        </p:txBody>
+      </p:sp>
+      <p:sp>
+        <p:nvSpPr>
+          <p:cNvPr id="105" name="Icon 105"/>
+          <p:cNvSpPr/>
           <p:nvPr/>
         </p:nvSpPr>
         <p:spPr>
           <a:xfrm>
-            <a:off x="7260771" y="1413880"/>
-            <a:ext cx="4538422" cy="3416320"/>
-          </a:xfrm>
-          <a:prstGeom prst="rect">
+            <a:off x="4030000" y="1935000"/>
+            <a:ext cx="520000" cy="520000"/>
+          </a:xfrm>
+          <a:prstGeom prst="ellipse">
             <a:avLst/>
           </a:prstGeom>
-          <a:noFill/>
-        </p:spPr>
-        <p:txBody>
-          <a:bodyPr wrap="none" rtlCol="0">
-            <a:spAutoFit/>
+          <a:solidFill>
+            <a:srgbClr val="FFFFFF"/>
+          </a:solidFill>
+          <a:ln w="19050">
+            <a:solidFill>
+              <a:srgbClr val="2E7D32"/>
+            </a:solidFill>
+          </a:ln>
+        </p:spPr>
+        <p:txBody>
+          <a:bodyPr wrap="square" lIns="0" tIns="0" rIns="0" bIns="0" rtlCol="0" anchor="ctr">
+            <a:noAutofit/>
           </a:bodyPr>
           <a:lstStyle/>
           <a:p>
-            <a:r>
-              <a:rPr lang="en-IN" sz="2000" b="1" dirty="0"/>
-              <a:t>Workflow:</a:t>
-            </a:r>
-            <a:endParaRPr lang="en-IN" sz="2000" dirty="0"/>
-          </a:p>
-          <a:p>
-            <a:r>
-              <a:rPr lang="en-IN" dirty="0"/>
-              <a:t>📷 Crop Image</a:t>
-            </a:r>
-            <a:br>
-              <a:rPr lang="en-IN" dirty="0"/>
-            </a:br>
-            <a:r>
-              <a:rPr lang="en-IN" dirty="0"/>
-              <a:t>⬇️</a:t>
-            </a:r>
-            <a:br>
-              <a:rPr lang="en-IN" dirty="0"/>
-            </a:br>
-            <a:r>
-              <a:rPr lang="en-IN" dirty="0"/>
-              <a:t>🧠 AI Model Processing</a:t>
-            </a:r>
-            <a:br>
-              <a:rPr lang="en-IN" dirty="0"/>
-            </a:br>
-            <a:r>
-              <a:rPr lang="en-IN" dirty="0"/>
-              <a:t>⬇️</a:t>
-            </a:r>
-            <a:br>
-              <a:rPr lang="en-IN" dirty="0"/>
-            </a:br>
-            <a:r>
-              <a:rPr lang="en-IN" dirty="0"/>
-              <a:t>🔍 Disease/Pest Identification</a:t>
-            </a:r>
-            <a:br>
-              <a:rPr lang="en-IN" dirty="0"/>
-            </a:br>
-            <a:r>
-              <a:rPr lang="en-IN" dirty="0"/>
-              <a:t>⬇️</a:t>
-            </a:r>
-            <a:br>
-              <a:rPr lang="en-IN" dirty="0"/>
-            </a:br>
-            <a:r>
-              <a:rPr lang="en-IN" dirty="0"/>
-              <a:t>📊 Severity Assessment</a:t>
-            </a:r>
-            <a:br>
-              <a:rPr lang="en-IN" dirty="0"/>
-            </a:br>
-            <a:r>
-              <a:rPr lang="en-IN" dirty="0"/>
-              <a:t>⬇️</a:t>
-            </a:r>
-            <a:br>
-              <a:rPr lang="en-IN" dirty="0"/>
-            </a:br>
-            <a:r>
-              <a:rPr lang="en-IN" dirty="0"/>
-              <a:t>🌱 Suggested Remedy + Preventive Measures</a:t>
-            </a:r>
-            <a:br>
-              <a:rPr lang="en-IN" dirty="0"/>
-            </a:br>
-            <a:r>
-              <a:rPr lang="en-IN" dirty="0"/>
-              <a:t>⬇️</a:t>
-            </a:r>
-            <a:br>
-              <a:rPr lang="en-IN" dirty="0"/>
-            </a:br>
-            <a:r>
-              <a:rPr lang="en-IN" dirty="0"/>
-              <a:t>🔔 Early Warning Alerts</a:t>
-            </a:r>
-          </a:p>
-        </p:txBody>
-      </p:sp>
-      <p:sp>
-        <p:nvSpPr>
-          <p:cNvPr id="5" name="TextBox 4">
-            <a:extLst>
-              <a:ext uri="{FF2B5EF4-FFF2-40B4-BE49-F238E27FC236}">
-                <a16:creationId xmlns:a16="http://schemas.microsoft.com/office/drawing/2014/main" id="{D4583811-82A5-23E8-3B91-622AAECCF5CD}"/>
-              </a:ext>
-            </a:extLst>
-          </p:cNvPr>
-          <p:cNvSpPr txBox="1"/>
+            <a:pPr algn="ctr">
+              <a:spcBef>
+                <a:spcPts val="0"/>
+              </a:spcBef>
+              <a:spcAft>
+                <a:spcPts val="0"/>
+              </a:spcAft>
+              <a:buNone/>
+            </a:pPr>
+            <a:r>
+              <a:rPr lang="en-IN" sz="1600" b="0" dirty="0">
+                <a:solidFill>
+                  <a:srgbClr val="2B2B2B"/>
+                </a:solidFill>
+              </a:rPr>
+              <a:t>👁️</a:t>
+            </a:r>
+          </a:p>
+        </p:txBody>
+      </p:sp>
+      <p:sp>
+        <p:nvSpPr>
+          <p:cNvPr id="106" name="Card 106"/>
+          <p:cNvSpPr/>
           <p:nvPr/>
         </p:nvSpPr>
         <p:spPr>
           <a:xfrm>
-            <a:off x="601916" y="5353903"/>
-            <a:ext cx="10913565" cy="677108"/>
-          </a:xfrm>
-          <a:prstGeom prst="rect">
+            <a:off x="500000" y="2770000"/>
+            <a:ext cx="3200000" cy="950000"/>
+          </a:xfrm>
+          <a:prstGeom prst="roundRect">
+            <a:avLst>
+              <a:gd name="adj" fmla="val 10000"/>
+            </a:avLst>
+          </a:prstGeom>
+          <a:solidFill>
+            <a:srgbClr val="E8F5E9"/>
+          </a:solidFill>
+          <a:ln w="12700">
+            <a:solidFill>
+              <a:srgbClr val="A5D6A7"/>
+            </a:solidFill>
+          </a:ln>
+        </p:spPr>
+        <p:txBody>
+          <a:bodyPr wrap="square" lIns="760000" tIns="45720" rIns="90000" bIns="45720" rtlCol="0" anchor="ctr">
+            <a:noAutofit/>
+          </a:bodyPr>
+          <a:lstStyle/>
+          <a:p>
+            <a:pPr algn="l">
+              <a:spcBef>
+                <a:spcPts val="0"/>
+              </a:spcBef>
+              <a:spcAft>
+                <a:spcPts val="200"/>
+              </a:spcAft>
+              <a:buNone/>
+            </a:pPr>
+            <a:r>
+              <a:rPr lang="en-IN" sz="1300" b="1" dirty="0">
+                <a:solidFill>
+                  <a:srgbClr val="1B5E20"/>
+                </a:solidFill>
+              </a:rPr>
+              <a:t>Machine Learning</a:t>
+            </a:r>
+          </a:p>
+          <a:p>
+            <a:pPr algn="l">
+              <a:spcBef>
+                <a:spcPts val="0"/>
+              </a:spcBef>
+              <a:spcAft>
+                <a:spcPts val="0"/>
+              </a:spcAft>
+              <a:buNone/>
+            </a:pPr>
+            <a:r>
+              <a:rPr lang="en-IN" sz="1100" b="0" dirty="0">
+                <a:solidFill>
+                  <a:srgbClr val="2B2B2B"/>
+                </a:solidFill>
+              </a:rPr>
+              <a:t>Disease prediction using environmental and crop data</a:t>
+            </a:r>
+          </a:p>
+        </p:txBody>
+      </p:sp>
+      <p:sp>
+        <p:nvSpPr>
+          <p:cNvPr id="107" name="Icon 107"/>
+          <p:cNvSpPr/>
+          <p:nvPr/>
+        </p:nvSpPr>
+        <p:spPr>
+          <a:xfrm>
+            <a:off x="630000" y="2985000"/>
+            <a:ext cx="520000" cy="520000"/>
+          </a:xfrm>
+          <a:prstGeom prst="ellipse">
             <a:avLst/>
           </a:prstGeom>
-          <a:noFill/>
-        </p:spPr>
-        <p:txBody>
-          <a:bodyPr wrap="none" rtlCol="0">
-            <a:spAutoFit/>
+          <a:solidFill>
+            <a:srgbClr val="FFFFFF"/>
+          </a:solidFill>
+          <a:ln w="19050">
+            <a:solidFill>
+              <a:srgbClr val="2E7D32"/>
+            </a:solidFill>
+          </a:ln>
+        </p:spPr>
+        <p:txBody>
+          <a:bodyPr wrap="square" lIns="0" tIns="0" rIns="0" bIns="0" rtlCol="0" anchor="ctr">
+            <a:noAutofit/>
           </a:bodyPr>
           <a:lstStyle/>
           <a:p>
-            <a:r>
-              <a:rPr lang="en-IN" sz="2000" b="1" dirty="0"/>
+            <a:pPr algn="ctr">
+              <a:spcBef>
+                <a:spcPts val="0"/>
+              </a:spcBef>
+              <a:spcAft>
+                <a:spcPts val="0"/>
+              </a:spcAft>
+              <a:buNone/>
+            </a:pPr>
+            <a:r>
+              <a:rPr lang="en-IN" sz="1600" b="0" dirty="0">
+                <a:solidFill>
+                  <a:srgbClr val="2B2B2B"/>
+                </a:solidFill>
+              </a:rPr>
+              <a:t>📈</a:t>
+            </a:r>
+          </a:p>
+        </p:txBody>
+      </p:sp>
+      <p:sp>
+        <p:nvSpPr>
+          <p:cNvPr id="108" name="Card 108"/>
+          <p:cNvSpPr/>
+          <p:nvPr/>
+        </p:nvSpPr>
+        <p:spPr>
+          <a:xfrm>
+            <a:off x="3900000" y="2770000"/>
+            <a:ext cx="3200000" cy="950000"/>
+          </a:xfrm>
+          <a:prstGeom prst="roundRect">
+            <a:avLst>
+              <a:gd name="adj" fmla="val 10000"/>
+            </a:avLst>
+          </a:prstGeom>
+          <a:solidFill>
+            <a:srgbClr val="E8F5E9"/>
+          </a:solidFill>
+          <a:ln w="12700">
+            <a:solidFill>
+              <a:srgbClr val="A5D6A7"/>
+            </a:solidFill>
+          </a:ln>
+        </p:spPr>
+        <p:txBody>
+          <a:bodyPr wrap="square" lIns="760000" tIns="45720" rIns="90000" bIns="45720" rtlCol="0" anchor="ctr">
+            <a:noAutofit/>
+          </a:bodyPr>
+          <a:lstStyle/>
+          <a:p>
+            <a:pPr algn="l">
+              <a:spcBef>
+                <a:spcPts val="0"/>
+              </a:spcBef>
+              <a:spcAft>
+                <a:spcPts val="200"/>
+              </a:spcAft>
+              <a:buNone/>
+            </a:pPr>
+            <a:r>
+              <a:rPr lang="en-IN" sz="1300" b="1" dirty="0">
+                <a:solidFill>
+                  <a:srgbClr val="1B5E20"/>
+                </a:solidFill>
+              </a:rPr>
+              <a:t>IoT Sensors</a:t>
+            </a:r>
+          </a:p>
+          <a:p>
+            <a:pPr algn="l">
+              <a:spcBef>
+                <a:spcPts val="0"/>
+              </a:spcBef>
+              <a:spcAft>
+                <a:spcPts val="0"/>
+              </a:spcAft>
+              <a:buNone/>
+            </a:pPr>
+            <a:r>
+              <a:rPr lang="en-IN" sz="1100" b="0" dirty="0">
+                <a:solidFill>
+                  <a:srgbClr val="2B2B2B"/>
+                </a:solidFill>
+              </a:rPr>
+              <a:t>Monitoring temperature, humidity, soil moisture, and weather conditions</a:t>
+            </a:r>
+          </a:p>
+        </p:txBody>
+      </p:sp>
+      <p:sp>
+        <p:nvSpPr>
+          <p:cNvPr id="109" name="Icon 109"/>
+          <p:cNvSpPr/>
+          <p:nvPr/>
+        </p:nvSpPr>
+        <p:spPr>
+          <a:xfrm>
+            <a:off x="4030000" y="2985000"/>
+            <a:ext cx="520000" cy="520000"/>
+          </a:xfrm>
+          <a:prstGeom prst="ellipse">
+            <a:avLst/>
+          </a:prstGeom>
+          <a:solidFill>
+            <a:srgbClr val="FFFFFF"/>
+          </a:solidFill>
+          <a:ln w="19050">
+            <a:solidFill>
+              <a:srgbClr val="2E7D32"/>
+            </a:solidFill>
+          </a:ln>
+        </p:spPr>
+        <p:txBody>
+          <a:bodyPr wrap="square" lIns="0" tIns="0" rIns="0" bIns="0" rtlCol="0" anchor="ctr">
+            <a:noAutofit/>
+          </a:bodyPr>
+          <a:lstStyle/>
+          <a:p>
+            <a:pPr algn="ctr">
+              <a:spcBef>
+                <a:spcPts val="0"/>
+              </a:spcBef>
+              <a:spcAft>
+                <a:spcPts val="0"/>
+              </a:spcAft>
+              <a:buNone/>
+            </a:pPr>
+            <a:r>
+              <a:rPr lang="en-IN" sz="1600" b="0" dirty="0">
+                <a:solidFill>
+                  <a:srgbClr val="2B2B2B"/>
+                </a:solidFill>
+              </a:rPr>
+              <a:t>📡</a:t>
+            </a:r>
+          </a:p>
+        </p:txBody>
+      </p:sp>
+      <p:sp>
+        <p:nvSpPr>
+          <p:cNvPr id="110" name="Card 110"/>
+          <p:cNvSpPr/>
+          <p:nvPr/>
+        </p:nvSpPr>
+        <p:spPr>
+          <a:xfrm>
+            <a:off x="500000" y="3820000"/>
+            <a:ext cx="3200000" cy="950000"/>
+          </a:xfrm>
+          <a:prstGeom prst="roundRect">
+            <a:avLst>
+              <a:gd name="adj" fmla="val 10000"/>
+            </a:avLst>
+          </a:prstGeom>
+          <a:solidFill>
+            <a:srgbClr val="E8F5E9"/>
+          </a:solidFill>
+          <a:ln w="12700">
+            <a:solidFill>
+              <a:srgbClr val="A5D6A7"/>
+            </a:solidFill>
+          </a:ln>
+        </p:spPr>
+        <p:txBody>
+          <a:bodyPr wrap="square" lIns="760000" tIns="45720" rIns="90000" bIns="45720" rtlCol="0" anchor="ctr">
+            <a:noAutofit/>
+          </a:bodyPr>
+          <a:lstStyle/>
+          <a:p>
+            <a:pPr algn="l">
+              <a:spcBef>
+                <a:spcPts val="0"/>
+              </a:spcBef>
+              <a:spcAft>
+                <a:spcPts val="200"/>
+              </a:spcAft>
+              <a:buNone/>
+            </a:pPr>
+            <a:r>
+              <a:rPr lang="en-IN" sz="1300" b="1" dirty="0">
+                <a:solidFill>
+                  <a:srgbClr val="1B5E20"/>
+                </a:solidFill>
+              </a:rPr>
+              <a:t>Cloud Platform</a:t>
+            </a:r>
+          </a:p>
+          <a:p>
+            <a:pPr algn="l">
+              <a:spcBef>
+                <a:spcPts val="0"/>
+              </a:spcBef>
+              <a:spcAft>
+                <a:spcPts val="0"/>
+              </a:spcAft>
+              <a:buNone/>
+            </a:pPr>
+            <a:r>
+              <a:rPr lang="en-IN" sz="1100" b="0" dirty="0">
+                <a:solidFill>
+                  <a:srgbClr val="2B2B2B"/>
+                </a:solidFill>
+              </a:rPr>
+              <a:t>Data storage, model training, and real-time recommendations</a:t>
+            </a:r>
+          </a:p>
+        </p:txBody>
+      </p:sp>
+      <p:sp>
+        <p:nvSpPr>
+          <p:cNvPr id="111" name="Icon 111"/>
+          <p:cNvSpPr/>
+          <p:nvPr/>
+        </p:nvSpPr>
+        <p:spPr>
+          <a:xfrm>
+            <a:off x="630000" y="4035000"/>
+            <a:ext cx="520000" cy="520000"/>
+          </a:xfrm>
+          <a:prstGeom prst="ellipse">
+            <a:avLst/>
+          </a:prstGeom>
+          <a:solidFill>
+            <a:srgbClr val="FFFFFF"/>
+          </a:solidFill>
+          <a:ln w="19050">
+            <a:solidFill>
+              <a:srgbClr val="2E7D32"/>
+            </a:solidFill>
+          </a:ln>
+        </p:spPr>
+        <p:txBody>
+          <a:bodyPr wrap="square" lIns="0" tIns="0" rIns="0" bIns="0" rtlCol="0" anchor="ctr">
+            <a:noAutofit/>
+          </a:bodyPr>
+          <a:lstStyle/>
+          <a:p>
+            <a:pPr algn="ctr">
+              <a:spcBef>
+                <a:spcPts val="0"/>
+              </a:spcBef>
+              <a:spcAft>
+                <a:spcPts val="0"/>
+              </a:spcAft>
+              <a:buNone/>
+            </a:pPr>
+            <a:r>
+              <a:rPr lang="en-IN" sz="1600" b="0" dirty="0">
+                <a:solidFill>
+                  <a:srgbClr val="2B2B2B"/>
+                </a:solidFill>
+              </a:rPr>
+              <a:t>☁️</a:t>
+            </a:r>
+          </a:p>
+        </p:txBody>
+      </p:sp>
+      <p:sp>
+        <p:nvSpPr>
+          <p:cNvPr id="112" name="Card 112"/>
+          <p:cNvSpPr/>
+          <p:nvPr/>
+        </p:nvSpPr>
+        <p:spPr>
+          <a:xfrm>
+            <a:off x="3900000" y="3820000"/>
+            <a:ext cx="3200000" cy="950000"/>
+          </a:xfrm>
+          <a:prstGeom prst="roundRect">
+            <a:avLst>
+              <a:gd name="adj" fmla="val 10000"/>
+            </a:avLst>
+          </a:prstGeom>
+          <a:solidFill>
+            <a:srgbClr val="E8F5E9"/>
+          </a:solidFill>
+          <a:ln w="12700">
+            <a:solidFill>
+              <a:srgbClr val="A5D6A7"/>
+            </a:solidFill>
+          </a:ln>
+        </p:spPr>
+        <p:txBody>
+          <a:bodyPr wrap="square" lIns="760000" tIns="45720" rIns="90000" bIns="45720" rtlCol="0" anchor="ctr">
+            <a:noAutofit/>
+          </a:bodyPr>
+          <a:lstStyle/>
+          <a:p>
+            <a:pPr algn="l">
+              <a:spcBef>
+                <a:spcPts val="0"/>
+              </a:spcBef>
+              <a:spcAft>
+                <a:spcPts val="200"/>
+              </a:spcAft>
+              <a:buNone/>
+            </a:pPr>
+            <a:r>
+              <a:rPr lang="en-IN" sz="1300" b="1" dirty="0">
+                <a:solidFill>
+                  <a:srgbClr val="1B5E20"/>
+                </a:solidFill>
+              </a:rPr>
+              <a:t>Mobile Application</a:t>
+            </a:r>
+          </a:p>
+          <a:p>
+            <a:pPr algn="l">
+              <a:spcBef>
+                <a:spcPts val="0"/>
+              </a:spcBef>
+              <a:spcAft>
+                <a:spcPts val="0"/>
+              </a:spcAft>
+              <a:buNone/>
+            </a:pPr>
+            <a:r>
+              <a:rPr lang="en-IN" sz="1100" b="0" dirty="0">
+                <a:solidFill>
+                  <a:srgbClr val="2B2B2B"/>
+                </a:solidFill>
+              </a:rPr>
+              <a:t>Farmer-friendly interface for disease scanning and alerts</a:t>
+            </a:r>
+          </a:p>
+        </p:txBody>
+      </p:sp>
+      <p:sp>
+        <p:nvSpPr>
+          <p:cNvPr id="113" name="Icon 113"/>
+          <p:cNvSpPr/>
+          <p:nvPr/>
+        </p:nvSpPr>
+        <p:spPr>
+          <a:xfrm>
+            <a:off x="4030000" y="4035000"/>
+            <a:ext cx="520000" cy="520000"/>
+          </a:xfrm>
+          <a:prstGeom prst="ellipse">
+            <a:avLst/>
+          </a:prstGeom>
+          <a:solidFill>
+            <a:srgbClr val="FFFFFF"/>
+          </a:solidFill>
+          <a:ln w="19050">
+            <a:solidFill>
+              <a:srgbClr val="2E7D32"/>
+            </a:solidFill>
+          </a:ln>
+        </p:spPr>
+        <p:txBody>
+          <a:bodyPr wrap="square" lIns="0" tIns="0" rIns="0" bIns="0" rtlCol="0" anchor="ctr">
+            <a:noAutofit/>
+          </a:bodyPr>
+          <a:lstStyle/>
+          <a:p>
+            <a:pPr algn="ctr">
+              <a:spcBef>
+                <a:spcPts val="0"/>
+              </a:spcBef>
+              <a:spcAft>
+                <a:spcPts val="0"/>
+              </a:spcAft>
+              <a:buNone/>
+            </a:pPr>
+            <a:r>
+              <a:rPr lang="en-IN" sz="1600" b="0" dirty="0">
+                <a:solidFill>
+                  <a:srgbClr val="2B2B2B"/>
+                </a:solidFill>
+              </a:rPr>
+              <a:t>📱</a:t>
+            </a:r>
+          </a:p>
+        </p:txBody>
+      </p:sp>
+      <p:sp>
+        <p:nvSpPr>
+          <p:cNvPr id="114" name="Header 114"/>
+          <p:cNvSpPr/>
+          <p:nvPr/>
+        </p:nvSpPr>
+        <p:spPr>
+          <a:xfrm>
+            <a:off x="7450000" y="1300000"/>
+            <a:ext cx="2200000" cy="340000"/>
+          </a:xfrm>
+          <a:prstGeom prst="roundRect">
+            <a:avLst>
+              <a:gd name="adj" fmla="val 50000"/>
+            </a:avLst>
+          </a:prstGeom>
+          <a:solidFill>
+            <a:srgbClr val="1B5E20"/>
+          </a:solidFill>
+          <a:ln>
+            <a:noFill/>
+          </a:ln>
+        </p:spPr>
+        <p:txBody>
+          <a:bodyPr wrap="square" lIns="91440" tIns="45720" rIns="91440" bIns="45720" rtlCol="0" anchor="ctr">
+            <a:noAutofit/>
+          </a:bodyPr>
+          <a:lstStyle/>
+          <a:p>
+            <a:pPr algn="ctr">
+              <a:spcBef>
+                <a:spcPts val="0"/>
+              </a:spcBef>
+              <a:spcAft>
+                <a:spcPts val="0"/>
+              </a:spcAft>
+              <a:buNone/>
+            </a:pPr>
+            <a:r>
+              <a:rPr lang="en-IN" sz="1500" b="1" dirty="0">
+                <a:solidFill>
+                  <a:srgbClr val="FFFFFF"/>
+                </a:solidFill>
+              </a:rPr>
+              <a:t>Workflow</a:t>
+            </a:r>
+          </a:p>
+        </p:txBody>
+      </p:sp>
+      <p:sp>
+        <p:nvSpPr>
+          <p:cNvPr id="115" name="Step 115"/>
+          <p:cNvSpPr/>
+          <p:nvPr/>
+        </p:nvSpPr>
+        <p:spPr>
+          <a:xfrm>
+            <a:off x="7450000" y="1720000"/>
+            <a:ext cx="4250000" cy="410000"/>
+          </a:xfrm>
+          <a:prstGeom prst="roundRect">
+            <a:avLst>
+              <a:gd name="adj" fmla="val 30000"/>
+            </a:avLst>
+          </a:prstGeom>
+          <a:solidFill>
+            <a:srgbClr val="FFFFFF"/>
+          </a:solidFill>
+          <a:ln w="15875">
+            <a:solidFill>
+              <a:srgbClr val="2E7D32"/>
+            </a:solidFill>
+          </a:ln>
+        </p:spPr>
+        <p:txBody>
+          <a:bodyPr wrap="square" lIns="180000" tIns="0" rIns="90000" bIns="0" rtlCol="0" anchor="ctr">
+            <a:noAutofit/>
+          </a:bodyPr>
+          <a:lstStyle/>
+          <a:p>
+            <a:pPr algn="l">
+              <a:spcBef>
+                <a:spcPts val="0"/>
+              </a:spcBef>
+              <a:spcAft>
+                <a:spcPts val="0"/>
+              </a:spcAft>
+              <a:buNone/>
+            </a:pPr>
+            <a:r>
+              <a:rPr lang="en-IN" sz="1300" b="1" dirty="0">
+                <a:solidFill>
+                  <a:srgbClr val="1B5E20"/>
+                </a:solidFill>
+              </a:rPr>
+              <a:t>📷  Crop Image</a:t>
+            </a:r>
+          </a:p>
+        </p:txBody>
+      </p:sp>
+      <p:sp>
+        <p:nvSpPr>
+          <p:cNvPr id="116" name="Arrow 116"/>
+          <p:cNvSpPr/>
+          <p:nvPr/>
+        </p:nvSpPr>
+        <p:spPr>
+          <a:xfrm>
+            <a:off x="9465000" y="2144000"/>
+            <a:ext cx="220000" cy="90000"/>
+          </a:xfrm>
+          <a:prstGeom prst="downArrow">
+            <a:avLst/>
+          </a:prstGeom>
+          <a:solidFill>
+            <a:srgbClr val="E65100"/>
+          </a:solidFill>
+          <a:ln>
+            <a:noFill/>
+          </a:ln>
+        </p:spPr>
+        <p:txBody>
+          <a:bodyPr wrap="square" lIns="0" tIns="0" rIns="0" bIns="0" rtlCol="0" anchor="ctr">
+            <a:noAutofit/>
+          </a:bodyPr>
+          <a:lstStyle/>
+          <a:p>
+            <a:endParaRPr lang="en-IN"/>
+          </a:p>
+        </p:txBody>
+      </p:sp>
+      <p:sp>
+        <p:nvSpPr>
+          <p:cNvPr id="117" name="Step 117"/>
+          <p:cNvSpPr/>
+          <p:nvPr/>
+        </p:nvSpPr>
+        <p:spPr>
+          <a:xfrm>
+            <a:off x="7450000" y="2248000"/>
+            <a:ext cx="4250000" cy="410000"/>
+          </a:xfrm>
+          <a:prstGeom prst="roundRect">
+            <a:avLst>
+              <a:gd name="adj" fmla="val 30000"/>
+            </a:avLst>
+          </a:prstGeom>
+          <a:solidFill>
+            <a:srgbClr val="FFFFFF"/>
+          </a:solidFill>
+          <a:ln w="15875">
+            <a:solidFill>
+              <a:srgbClr val="2E7D32"/>
+            </a:solidFill>
+          </a:ln>
+        </p:spPr>
+        <p:txBody>
+          <a:bodyPr wrap="square" lIns="180000" tIns="0" rIns="90000" bIns="0" rtlCol="0" anchor="ctr">
+            <a:noAutofit/>
+          </a:bodyPr>
+          <a:lstStyle/>
+          <a:p>
+            <a:pPr algn="l">
+              <a:spcBef>
+                <a:spcPts val="0"/>
+              </a:spcBef>
+              <a:spcAft>
+                <a:spcPts val="0"/>
+              </a:spcAft>
+              <a:buNone/>
+            </a:pPr>
+            <a:r>
+              <a:rPr lang="en-IN" sz="1300" b="1" dirty="0">
+                <a:solidFill>
+                  <a:srgbClr val="1B5E20"/>
+                </a:solidFill>
+              </a:rPr>
+              <a:t>🧠  AI Model Processing</a:t>
+            </a:r>
+          </a:p>
+        </p:txBody>
+      </p:sp>
+      <p:sp>
+        <p:nvSpPr>
+          <p:cNvPr id="118" name="Arrow 118"/>
+          <p:cNvSpPr/>
+          <p:nvPr/>
+        </p:nvSpPr>
+        <p:spPr>
+          <a:xfrm>
+            <a:off x="9465000" y="2672000"/>
+            <a:ext cx="220000" cy="90000"/>
+          </a:xfrm>
+          <a:prstGeom prst="downArrow">
+            <a:avLst/>
+          </a:prstGeom>
+          <a:solidFill>
+            <a:srgbClr val="E65100"/>
+          </a:solidFill>
+          <a:ln>
+            <a:noFill/>
+          </a:ln>
+        </p:spPr>
+        <p:txBody>
+          <a:bodyPr wrap="square" lIns="0" tIns="0" rIns="0" bIns="0" rtlCol="0" anchor="ctr">
+            <a:noAutofit/>
+          </a:bodyPr>
+          <a:lstStyle/>
+          <a:p>
+            <a:endParaRPr lang="en-IN"/>
+          </a:p>
+        </p:txBody>
+      </p:sp>
+      <p:sp>
+        <p:nvSpPr>
+          <p:cNvPr id="119" name="Step 119"/>
+          <p:cNvSpPr/>
+          <p:nvPr/>
+        </p:nvSpPr>
+        <p:spPr>
+          <a:xfrm>
+            <a:off x="7450000" y="2776000"/>
+            <a:ext cx="4250000" cy="410000"/>
+          </a:xfrm>
+          <a:prstGeom prst="roundRect">
+            <a:avLst>
+              <a:gd name="adj" fmla="val 30000"/>
+            </a:avLst>
+          </a:prstGeom>
+          <a:solidFill>
+            <a:srgbClr val="FFFFFF"/>
+          </a:solidFill>
+          <a:ln w="15875">
+            <a:solidFill>
+              <a:srgbClr val="2E7D32"/>
+            </a:solidFill>
+          </a:ln>
+        </p:spPr>
+        <p:txBody>
+          <a:bodyPr wrap="square" lIns="180000" tIns="0" rIns="90000" bIns="0" rtlCol="0" anchor="ctr">
+            <a:noAutofit/>
+          </a:bodyPr>
+          <a:lstStyle/>
+          <a:p>
+            <a:pPr algn="l">
+              <a:spcBef>
+                <a:spcPts val="0"/>
+              </a:spcBef>
+              <a:spcAft>
+                <a:spcPts val="0"/>
+              </a:spcAft>
+              <a:buNone/>
+            </a:pPr>
+            <a:r>
+              <a:rPr lang="en-IN" sz="1300" b="1" dirty="0">
+                <a:solidFill>
+                  <a:srgbClr val="1B5E20"/>
+                </a:solidFill>
+              </a:rPr>
+              <a:t>🔍  Disease/Pest Identification</a:t>
+            </a:r>
+          </a:p>
+        </p:txBody>
+      </p:sp>
+      <p:sp>
+        <p:nvSpPr>
+          <p:cNvPr id="120" name="Arrow 120"/>
+          <p:cNvSpPr/>
+          <p:nvPr/>
+        </p:nvSpPr>
+        <p:spPr>
+          <a:xfrm>
+            <a:off x="9465000" y="3200000"/>
+            <a:ext cx="220000" cy="90000"/>
+          </a:xfrm>
+          <a:prstGeom prst="downArrow">
+            <a:avLst/>
+          </a:prstGeom>
+          <a:solidFill>
+            <a:srgbClr val="E65100"/>
+          </a:solidFill>
+          <a:ln>
+            <a:noFill/>
+          </a:ln>
+        </p:spPr>
+        <p:txBody>
+          <a:bodyPr wrap="square" lIns="0" tIns="0" rIns="0" bIns="0" rtlCol="0" anchor="ctr">
+            <a:noAutofit/>
+          </a:bodyPr>
+          <a:lstStyle/>
+          <a:p>
+            <a:endParaRPr lang="en-IN"/>
+          </a:p>
+        </p:txBody>
+      </p:sp>
+      <p:sp>
+        <p:nvSpPr>
+          <p:cNvPr id="121" name="Step 121"/>
+          <p:cNvSpPr/>
+          <p:nvPr/>
+        </p:nvSpPr>
+        <p:spPr>
+          <a:xfrm>
+            <a:off x="7450000" y="3304000"/>
+            <a:ext cx="4250000" cy="410000"/>
+          </a:xfrm>
+          <a:prstGeom prst="roundRect">
+            <a:avLst>
+              <a:gd name="adj" fmla="val 30000"/>
+            </a:avLst>
+          </a:prstGeom>
+          <a:solidFill>
+            <a:srgbClr val="FFFFFF"/>
+          </a:solidFill>
+          <a:ln w="15875">
+            <a:solidFill>
+              <a:srgbClr val="2E7D32"/>
+            </a:solidFill>
+          </a:ln>
+        </p:spPr>
+        <p:txBody>
+          <a:bodyPr wrap="square" lIns="180000" tIns="0" rIns="90000" bIns="0" rtlCol="0" anchor="ctr">
+            <a:noAutofit/>
+          </a:bodyPr>
+          <a:lstStyle/>
+          <a:p>
+            <a:pPr algn="l">
+              <a:spcBef>
+                <a:spcPts val="0"/>
+              </a:spcBef>
+              <a:spcAft>
+                <a:spcPts val="0"/>
+              </a:spcAft>
+              <a:buNone/>
+            </a:pPr>
+            <a:r>
+              <a:rPr lang="en-IN" sz="1300" b="1" dirty="0">
+                <a:solidFill>
+                  <a:srgbClr val="1B5E20"/>
+                </a:solidFill>
+              </a:rPr>
+              <a:t>📊  Severity Assessment</a:t>
+            </a:r>
+          </a:p>
+        </p:txBody>
+      </p:sp>
+      <p:sp>
+        <p:nvSpPr>
+          <p:cNvPr id="122" name="Arrow 122"/>
+          <p:cNvSpPr/>
+          <p:nvPr/>
+        </p:nvSpPr>
+        <p:spPr>
+          <a:xfrm>
+            <a:off x="9465000" y="3728000"/>
+            <a:ext cx="220000" cy="90000"/>
+          </a:xfrm>
+          <a:prstGeom prst="downArrow">
+            <a:avLst/>
+          </a:prstGeom>
+          <a:solidFill>
+            <a:srgbClr val="E65100"/>
+          </a:solidFill>
+          <a:ln>
+            <a:noFill/>
+          </a:ln>
+        </p:spPr>
+        <p:txBody>
+          <a:bodyPr wrap="square" lIns="0" tIns="0" rIns="0" bIns="0" rtlCol="0" anchor="ctr">
+            <a:noAutofit/>
+          </a:bodyPr>
+          <a:lstStyle/>
+          <a:p>
+            <a:endParaRPr lang="en-IN"/>
+          </a:p>
+        </p:txBody>
+      </p:sp>
+      <p:sp>
+        <p:nvSpPr>
+          <p:cNvPr id="123" name="Step 123"/>
+          <p:cNvSpPr/>
+          <p:nvPr/>
+        </p:nvSpPr>
+        <p:spPr>
+          <a:xfrm>
+            <a:off x="7450000" y="3832000"/>
+            <a:ext cx="4250000" cy="410000"/>
+          </a:xfrm>
+          <a:prstGeom prst="roundRect">
+            <a:avLst>
+              <a:gd name="adj" fmla="val 30000"/>
+            </a:avLst>
+          </a:prstGeom>
+          <a:solidFill>
+            <a:srgbClr val="FFFFFF"/>
+          </a:solidFill>
+          <a:ln w="15875">
+            <a:solidFill>
+              <a:srgbClr val="2E7D32"/>
+            </a:solidFill>
+          </a:ln>
+        </p:spPr>
+        <p:txBody>
+          <a:bodyPr wrap="square" lIns="180000" tIns="0" rIns="90000" bIns="0" rtlCol="0" anchor="ctr">
+            <a:noAutofit/>
+          </a:bodyPr>
+          <a:lstStyle/>
+          <a:p>
+            <a:pPr algn="l">
+              <a:spcBef>
+                <a:spcPts val="0"/>
+              </a:spcBef>
+              <a:spcAft>
+                <a:spcPts val="0"/>
+              </a:spcAft>
+              <a:buNone/>
+            </a:pPr>
+            <a:r>
+              <a:rPr lang="en-IN" sz="1300" b="1" dirty="0">
+                <a:solidFill>
+                  <a:srgbClr val="1B5E20"/>
+                </a:solidFill>
+              </a:rPr>
+              <a:t>🌱  Suggested Remedy + Preventive Measures</a:t>
+            </a:r>
+          </a:p>
+        </p:txBody>
+      </p:sp>
+      <p:sp>
+        <p:nvSpPr>
+          <p:cNvPr id="124" name="Arrow 124"/>
+          <p:cNvSpPr/>
+          <p:nvPr/>
+        </p:nvSpPr>
+        <p:spPr>
+          <a:xfrm>
+            <a:off x="9465000" y="4256000"/>
+            <a:ext cx="220000" cy="90000"/>
+          </a:xfrm>
+          <a:prstGeom prst="downArrow">
+            <a:avLst/>
+          </a:prstGeom>
+          <a:solidFill>
+            <a:srgbClr val="E65100"/>
+          </a:solidFill>
+          <a:ln>
+            <a:noFill/>
+          </a:ln>
+        </p:spPr>
+        <p:txBody>
+          <a:bodyPr wrap="square" lIns="0" tIns="0" rIns="0" bIns="0" rtlCol="0" anchor="ctr">
+            <a:noAutofit/>
+          </a:bodyPr>
+          <a:lstStyle/>
+          <a:p>
+            <a:endParaRPr lang="en-IN"/>
+          </a:p>
+        </p:txBody>
+      </p:sp>
+      <p:sp>
+        <p:nvSpPr>
+          <p:cNvPr id="125" name="Step 125"/>
+          <p:cNvSpPr/>
+          <p:nvPr/>
+        </p:nvSpPr>
+        <p:spPr>
+          <a:xfrm>
+            <a:off x="7450000" y="4360000"/>
+            <a:ext cx="4250000" cy="410000"/>
+          </a:xfrm>
+          <a:prstGeom prst="roundRect">
+            <a:avLst>
+              <a:gd name="adj" fmla="val 30000"/>
+            </a:avLst>
+          </a:prstGeom>
+          <a:solidFill>
+            <a:srgbClr val="2E7D32"/>
+          </a:solidFill>
+          <a:ln w="15875">
+            <a:solidFill>
+              <a:srgbClr val="2E7D32"/>
+            </a:solidFill>
+          </a:ln>
+        </p:spPr>
+        <p:txBody>
+          <a:bodyPr wrap="square" lIns="180000" tIns="0" rIns="90000" bIns="0" rtlCol="0" anchor="ctr">
+            <a:noAutofit/>
+          </a:bodyPr>
+          <a:lstStyle/>
+          <a:p>
+            <a:pPr algn="l">
+              <a:spcBef>
+                <a:spcPts val="0"/>
+              </a:spcBef>
+              <a:spcAft>
+                <a:spcPts val="0"/>
+              </a:spcAft>
+              <a:buNone/>
+            </a:pPr>
+            <a:r>
+              <a:rPr lang="en-IN" sz="1300" b="1" dirty="0">
+                <a:solidFill>
+                  <a:srgbClr val="FFFFFF"/>
+                </a:solidFill>
+              </a:rPr>
+              <a:t>🔔  Early Warning Alerts</a:t>
+            </a:r>
+          </a:p>
+        </p:txBody>
+      </p:sp>
+      <p:sp>
+        <p:nvSpPr>
+          <p:cNvPr id="126" name="Header 126"/>
+          <p:cNvSpPr/>
+          <p:nvPr/>
+        </p:nvSpPr>
+        <p:spPr>
+          <a:xfrm>
+            <a:off x="500000" y="4980000"/>
+            <a:ext cx="3600000" cy="340000"/>
+          </a:xfrm>
+          <a:prstGeom prst="roundRect">
+            <a:avLst>
+              <a:gd name="adj" fmla="val 50000"/>
+            </a:avLst>
+          </a:prstGeom>
+          <a:solidFill>
+            <a:srgbClr val="1B5E20"/>
+          </a:solidFill>
+          <a:ln>
+            <a:noFill/>
+          </a:ln>
+        </p:spPr>
+        <p:txBody>
+          <a:bodyPr wrap="square" lIns="91440" tIns="45720" rIns="91440" bIns="45720" rtlCol="0" anchor="ctr">
+            <a:noAutofit/>
+          </a:bodyPr>
+          <a:lstStyle/>
+          <a:p>
+            <a:pPr algn="ctr">
+              <a:spcBef>
+                <a:spcPts val="0"/>
+              </a:spcBef>
+              <a:spcAft>
+                <a:spcPts val="0"/>
+              </a:spcAft>
+              <a:buNone/>
+            </a:pPr>
+            <a:r>
+              <a:rPr lang="en-IN" sz="1500" b="1" dirty="0">
+                <a:solidFill>
+                  <a:srgbClr val="FFFFFF"/>
+                </a:solidFill>
+              </a:rPr>
               <a:t>Implementation Methodology</a:t>
             </a:r>
           </a:p>
-          <a:p>
-            <a:r>
-              <a:rPr lang="en-IN" b="1" dirty="0"/>
-              <a:t>Farmer → Mobile App → Image Capture → AI Disease Detection → Risk Analysis → Treatment Recommendation</a:t>
-            </a:r>
-            <a:endParaRPr lang="en-IN" dirty="0"/>
+        </p:txBody>
+      </p:sp>
+      <p:sp>
+        <p:nvSpPr>
+          <p:cNvPr id="127" name="Flow 127"/>
+          <p:cNvSpPr/>
+          <p:nvPr/>
+        </p:nvSpPr>
+        <p:spPr>
+          <a:xfrm>
+            <a:off x="500000" y="5420000"/>
+            <a:ext cx="1620000" cy="680000"/>
+          </a:xfrm>
+          <a:prstGeom prst="roundRect">
+            <a:avLst>
+              <a:gd name="adj" fmla="val 18000"/>
+            </a:avLst>
+          </a:prstGeom>
+          <a:solidFill>
+            <a:srgbClr val="E8F5E9"/>
+          </a:solidFill>
+          <a:ln w="12700">
+            <a:solidFill>
+              <a:srgbClr val="A5D6A7"/>
+            </a:solidFill>
+          </a:ln>
+        </p:spPr>
+        <p:txBody>
+          <a:bodyPr wrap="square" lIns="60000" tIns="30000" rIns="60000" bIns="30000" rtlCol="0" anchor="ctr">
+            <a:noAutofit/>
+          </a:bodyPr>
+          <a:lstStyle/>
+          <a:p>
+            <a:pPr algn="ctr">
+              <a:spcBef>
+                <a:spcPts val="0"/>
+              </a:spcBef>
+              <a:spcAft>
+                <a:spcPts val="0"/>
+              </a:spcAft>
+              <a:buNone/>
+            </a:pPr>
+            <a:r>
+              <a:rPr lang="en-IN" sz="1200" b="1" dirty="0">
+                <a:solidFill>
+                  <a:srgbClr val="1B5E20"/>
+                </a:solidFill>
+              </a:rPr>
+              <a:t>Farmer</a:t>
+            </a:r>
+          </a:p>
+        </p:txBody>
+      </p:sp>
+      <p:sp>
+        <p:nvSpPr>
+          <p:cNvPr id="128" name="Arrow 128"/>
+          <p:cNvSpPr/>
+          <p:nvPr/>
+        </p:nvSpPr>
+        <p:spPr>
+          <a:xfrm>
+            <a:off x="2158000" y="5660000"/>
+            <a:ext cx="220000" cy="200000"/>
+          </a:xfrm>
+          <a:prstGeom prst="rightArrow">
+            <a:avLst/>
+          </a:prstGeom>
+          <a:solidFill>
+            <a:srgbClr val="E65100"/>
+          </a:solidFill>
+          <a:ln>
+            <a:noFill/>
+          </a:ln>
+        </p:spPr>
+        <p:txBody>
+          <a:bodyPr wrap="square" lIns="0" tIns="0" rIns="0" bIns="0" rtlCol="0" anchor="ctr">
+            <a:noAutofit/>
+          </a:bodyPr>
+          <a:lstStyle/>
+          <a:p>
+            <a:endParaRPr lang="en-IN"/>
+          </a:p>
+        </p:txBody>
+      </p:sp>
+      <p:sp>
+        <p:nvSpPr>
+          <p:cNvPr id="129" name="Flow 129"/>
+          <p:cNvSpPr/>
+          <p:nvPr/>
+        </p:nvSpPr>
+        <p:spPr>
+          <a:xfrm>
+            <a:off x="2416000" y="5420000"/>
+            <a:ext cx="1620000" cy="680000"/>
+          </a:xfrm>
+          <a:prstGeom prst="roundRect">
+            <a:avLst>
+              <a:gd name="adj" fmla="val 18000"/>
+            </a:avLst>
+          </a:prstGeom>
+          <a:solidFill>
+            <a:srgbClr val="E8F5E9"/>
+          </a:solidFill>
+          <a:ln w="12700">
+            <a:solidFill>
+              <a:srgbClr val="A5D6A7"/>
+            </a:solidFill>
+          </a:ln>
+        </p:spPr>
+        <p:txBody>
+          <a:bodyPr wrap="square" lIns="60000" tIns="30000" rIns="60000" bIns="30000" rtlCol="0" anchor="ctr">
+            <a:noAutofit/>
+          </a:bodyPr>
+          <a:lstStyle/>
+          <a:p>
+            <a:pPr algn="ctr">
+              <a:spcBef>
+                <a:spcPts val="0"/>
+              </a:spcBef>
+              <a:spcAft>
+                <a:spcPts val="0"/>
+              </a:spcAft>
+              <a:buNone/>
+            </a:pPr>
+            <a:r>
+              <a:rPr lang="en-IN" sz="1200" b="1" dirty="0">
+                <a:solidFill>
+                  <a:srgbClr val="1B5E20"/>
+                </a:solidFill>
+              </a:rPr>
+              <a:t>Mobile App</a:t>
+            </a:r>
+          </a:p>
+        </p:txBody>
+      </p:sp>
+      <p:sp>
+        <p:nvSpPr>
+          <p:cNvPr id="130" name="Arrow 130"/>
+          <p:cNvSpPr/>
+          <p:nvPr/>
+        </p:nvSpPr>
+        <p:spPr>
+          <a:xfrm>
+            <a:off x="4074000" y="5660000"/>
+            <a:ext cx="220000" cy="200000"/>
+          </a:xfrm>
+          <a:prstGeom prst="rightArrow">
+            <a:avLst/>
+          </a:prstGeom>
+          <a:solidFill>
+            <a:srgbClr val="E65100"/>
+          </a:solidFill>
+          <a:ln>
+            <a:noFill/>
+          </a:ln>
+        </p:spPr>
+        <p:txBody>
+          <a:bodyPr wrap="square" lIns="0" tIns="0" rIns="0" bIns="0" rtlCol="0" anchor="ctr">
+            <a:noAutofit/>
+          </a:bodyPr>
+          <a:lstStyle/>
+          <a:p>
+            <a:endParaRPr lang="en-IN"/>
+          </a:p>
+        </p:txBody>
+      </p:sp>
+      <p:sp>
+        <p:nvSpPr>
+          <p:cNvPr id="131" name="Flow 131"/>
+          <p:cNvSpPr/>
+          <p:nvPr/>
+        </p:nvSpPr>
+        <p:spPr>
+          <a:xfrm>
+            <a:off x="4332000" y="5420000"/>
+            <a:ext cx="1620000" cy="680000"/>
+          </a:xfrm>
+          <a:prstGeom prst="roundRect">
+            <a:avLst>
+              <a:gd name="adj" fmla="val 18000"/>
+            </a:avLst>
+          </a:prstGeom>
+          <a:solidFill>
+            <a:srgbClr val="E8F5E9"/>
+          </a:solidFill>
+          <a:ln w="12700">
+            <a:solidFill>
+              <a:srgbClr val="A5D6A7"/>
+            </a:solidFill>
+          </a:ln>
+        </p:spPr>
+        <p:txBody>
+          <a:bodyPr wrap="square" lIns="60000" tIns="30000" rIns="60000" bIns="30000" rtlCol="0" anchor="ctr">
+            <a:noAutofit/>
+          </a:bodyPr>
+          <a:lstStyle/>
+          <a:p>
+            <a:pPr algn="ctr">
+              <a:spcBef>
+                <a:spcPts val="0"/>
+              </a:spcBef>
+              <a:spcAft>
+                <a:spcPts val="0"/>
+              </a:spcAft>
+              <a:buNone/>
+            </a:pPr>
+            <a:r>
+              <a:rPr lang="en-IN" sz="1200" b="1" dirty="0">
+                <a:solidFill>
+                  <a:srgbClr val="1B5E20"/>
+                </a:solidFill>
+              </a:rPr>
+              <a:t>Image Capture</a:t>
+            </a:r>
+          </a:p>
+        </p:txBody>
+      </p:sp>
+      <p:sp>
+        <p:nvSpPr>
+          <p:cNvPr id="132" name="Arrow 132"/>
+          <p:cNvSpPr/>
+          <p:nvPr/>
+        </p:nvSpPr>
+        <p:spPr>
+          <a:xfrm>
+            <a:off x="5990000" y="5660000"/>
+            <a:ext cx="220000" cy="200000"/>
+          </a:xfrm>
+          <a:prstGeom prst="rightArrow">
+            <a:avLst/>
+          </a:prstGeom>
+          <a:solidFill>
+            <a:srgbClr val="E65100"/>
+          </a:solidFill>
+          <a:ln>
+            <a:noFill/>
+          </a:ln>
+        </p:spPr>
+        <p:txBody>
+          <a:bodyPr wrap="square" lIns="0" tIns="0" rIns="0" bIns="0" rtlCol="0" anchor="ctr">
+            <a:noAutofit/>
+          </a:bodyPr>
+          <a:lstStyle/>
+          <a:p>
+            <a:endParaRPr lang="en-IN"/>
+          </a:p>
+        </p:txBody>
+      </p:sp>
+      <p:sp>
+        <p:nvSpPr>
+          <p:cNvPr id="133" name="Flow 133"/>
+          <p:cNvSpPr/>
+          <p:nvPr/>
+        </p:nvSpPr>
+        <p:spPr>
+          <a:xfrm>
+            <a:off x="6248000" y="5420000"/>
+            <a:ext cx="1620000" cy="680000"/>
+          </a:xfrm>
+          <a:prstGeom prst="roundRect">
+            <a:avLst>
+              <a:gd name="adj" fmla="val 18000"/>
+            </a:avLst>
+          </a:prstGeom>
+          <a:solidFill>
+            <a:srgbClr val="E8F5E9"/>
+          </a:solidFill>
+          <a:ln w="12700">
+            <a:solidFill>
+              <a:srgbClr val="A5D6A7"/>
+            </a:solidFill>
+          </a:ln>
+        </p:spPr>
+        <p:txBody>
+          <a:bodyPr wrap="square" lIns="60000" tIns="30000" rIns="60000" bIns="30000" rtlCol="0" anchor="ctr">
+            <a:noAutofit/>
+          </a:bodyPr>
+          <a:lstStyle/>
+          <a:p>
+            <a:pPr algn="ctr">
+              <a:spcBef>
+                <a:spcPts val="0"/>
+              </a:spcBef>
+              <a:spcAft>
+                <a:spcPts val="0"/>
+              </a:spcAft>
+              <a:buNone/>
+            </a:pPr>
+            <a:r>
+              <a:rPr lang="en-IN" sz="1200" b="1" dirty="0">
+                <a:solidFill>
+                  <a:srgbClr val="1B5E20"/>
+                </a:solidFill>
+              </a:rPr>
+              <a:t>AI Disease Detection</a:t>
+            </a:r>
+          </a:p>
+        </p:txBody>
+      </p:sp>
+      <p:sp>
+        <p:nvSpPr>
+          <p:cNvPr id="134" name="Arrow 134"/>
+          <p:cNvSpPr/>
+          <p:nvPr/>
+        </p:nvSpPr>
+        <p:spPr>
+          <a:xfrm>
+            <a:off x="7906000" y="5660000"/>
+            <a:ext cx="220000" cy="200000"/>
+          </a:xfrm>
+          <a:prstGeom prst="rightArrow">
+            <a:avLst/>
+          </a:prstGeom>
+          <a:solidFill>
+            <a:srgbClr val="E65100"/>
+          </a:solidFill>
+          <a:ln>
+            <a:noFill/>
+          </a:ln>
+        </p:spPr>
+        <p:txBody>
+          <a:bodyPr wrap="square" lIns="0" tIns="0" rIns="0" bIns="0" rtlCol="0" anchor="ctr">
+            <a:noAutofit/>
+          </a:bodyPr>
+          <a:lstStyle/>
+          <a:p>
+            <a:endParaRPr lang="en-IN"/>
+          </a:p>
+        </p:txBody>
+      </p:sp>
+      <p:sp>
+        <p:nvSpPr>
+          <p:cNvPr id="135" name="Flow 135"/>
+          <p:cNvSpPr/>
+          <p:nvPr/>
+        </p:nvSpPr>
+        <p:spPr>
+          <a:xfrm>
+            <a:off x="8164000" y="5420000"/>
+            <a:ext cx="1620000" cy="680000"/>
+          </a:xfrm>
+          <a:prstGeom prst="roundRect">
+            <a:avLst>
+              <a:gd name="adj" fmla="val 18000"/>
+            </a:avLst>
+          </a:prstGeom>
+          <a:solidFill>
+            <a:srgbClr val="E8F5E9"/>
+          </a:solidFill>
+          <a:ln w="12700">
+            <a:solidFill>
+              <a:srgbClr val="A5D6A7"/>
+            </a:solidFill>
+          </a:ln>
+        </p:spPr>
+        <p:txBody>
+          <a:bodyPr wrap="square" lIns="60000" tIns="30000" rIns="60000" bIns="30000" rtlCol="0" anchor="ctr">
+            <a:noAutofit/>
+          </a:bodyPr>
+          <a:lstStyle/>
+          <a:p>
+            <a:pPr algn="ctr">
+              <a:spcBef>
+                <a:spcPts val="0"/>
+              </a:spcBef>
+              <a:spcAft>
+                <a:spcPts val="0"/>
+              </a:spcAft>
+              <a:buNone/>
+            </a:pPr>
+            <a:r>
+              <a:rPr lang="en-IN" sz="1200" b="1" dirty="0">
+                <a:solidFill>
+                  <a:srgbClr val="1B5E20"/>
+                </a:solidFill>
+              </a:rPr>
+              <a:t>Risk Analysis</a:t>
+            </a:r>
+          </a:p>
+        </p:txBody>
+      </p:sp>
+      <p:sp>
+        <p:nvSpPr>
+          <p:cNvPr id="136" name="Arrow 136"/>
+          <p:cNvSpPr/>
+          <p:nvPr/>
+        </p:nvSpPr>
+        <p:spPr>
+          <a:xfrm>
+            <a:off x="9822000" y="5660000"/>
+            <a:ext cx="220000" cy="200000"/>
+          </a:xfrm>
+          <a:prstGeom prst="rightArrow">
+            <a:avLst/>
+          </a:prstGeom>
+          <a:solidFill>
+            <a:srgbClr val="E65100"/>
+          </a:solidFill>
+          <a:ln>
+            <a:noFill/>
+          </a:ln>
+        </p:spPr>
+        <p:txBody>
+          <a:bodyPr wrap="square" lIns="0" tIns="0" rIns="0" bIns="0" rtlCol="0" anchor="ctr">
+            <a:noAutofit/>
+          </a:bodyPr>
+          <a:lstStyle/>
+          <a:p>
+            <a:endParaRPr lang="en-IN"/>
+          </a:p>
+        </p:txBody>
+      </p:sp>
+      <p:sp>
+        <p:nvSpPr>
+          <p:cNvPr id="137" name="Flow 137"/>
+          <p:cNvSpPr/>
+          <p:nvPr/>
+        </p:nvSpPr>
+        <p:spPr>
+          <a:xfrm>
+            <a:off x="10080000" y="5420000"/>
+            <a:ext cx="1620000" cy="680000"/>
+          </a:xfrm>
+          <a:prstGeom prst="roundRect">
+            <a:avLst>
+              <a:gd name="adj" fmla="val 18000"/>
+            </a:avLst>
+          </a:prstGeom>
+          <a:solidFill>
+            <a:srgbClr val="2E7D32"/>
+          </a:solidFill>
+          <a:ln w="12700">
+            <a:solidFill>
+              <a:srgbClr val="2E7D32"/>
+            </a:solidFill>
+          </a:ln>
+        </p:spPr>
+        <p:txBody>
+          <a:bodyPr wrap="square" lIns="60000" tIns="30000" rIns="60000" bIns="30000" rtlCol="0" anchor="ctr">
+            <a:noAutofit/>
+          </a:bodyPr>
+          <a:lstStyle/>
+          <a:p>
+            <a:pPr algn="ctr">
+              <a:spcBef>
+                <a:spcPts val="0"/>
+              </a:spcBef>
+              <a:spcAft>
+                <a:spcPts val="0"/>
+              </a:spcAft>
+              <a:buNone/>
+            </a:pPr>
+            <a:r>
+              <a:rPr lang="en-IN" sz="1200" b="1" dirty="0">
+                <a:solidFill>
+                  <a:srgbClr val="FFFFFF"/>
+                </a:solidFill>
+              </a:rPr>
+              <a:t>Treatment Recommendation</a:t>
+            </a:r>
           </a:p>
         </p:txBody>
       </p:sp>
@@ -7396,118 +8903,822 @@
       </p:pic>
       <p:sp>
         <p:nvSpPr>
-          <p:cNvPr id="2" name="TextBox 1">
-            <a:extLst>
-              <a:ext uri="{FF2B5EF4-FFF2-40B4-BE49-F238E27FC236}">
-                <a16:creationId xmlns:a16="http://schemas.microsoft.com/office/drawing/2014/main" id="{80B20556-0242-617B-A9BC-6E0FC7F7DE51}"/>
-              </a:ext>
-            </a:extLst>
-          </p:cNvPr>
-          <p:cNvSpPr txBox="1"/>
+          <p:cNvPr id="138" name="ColHeader 138"/>
+          <p:cNvSpPr/>
           <p:nvPr/>
         </p:nvSpPr>
         <p:spPr>
           <a:xfrm>
-            <a:off x="809361" y="1602205"/>
-            <a:ext cx="8323754" cy="4708981"/>
-          </a:xfrm>
-          <a:prstGeom prst="rect">
-            <a:avLst/>
+            <a:off x="500000" y="1450000"/>
+            <a:ext cx="3550000" cy="560000"/>
+          </a:xfrm>
+          <a:prstGeom prst="roundRect">
+            <a:avLst>
+              <a:gd name="adj" fmla="val 25000"/>
+            </a:avLst>
           </a:prstGeom>
-          <a:noFill/>
-        </p:spPr>
-        <p:txBody>
-          <a:bodyPr wrap="square" rtlCol="0">
-            <a:spAutoFit/>
+          <a:solidFill>
+            <a:srgbClr val="2E7D32"/>
+          </a:solidFill>
+          <a:ln>
+            <a:noFill/>
+          </a:ln>
+        </p:spPr>
+        <p:txBody>
+          <a:bodyPr wrap="square" lIns="91440" tIns="45720" rIns="91440" bIns="45720" rtlCol="0" anchor="ctr">
+            <a:noAutofit/>
           </a:bodyPr>
           <a:lstStyle/>
           <a:p>
-            <a:r>
-              <a:rPr lang="en-IN" sz="2000" b="1" dirty="0"/>
-              <a:t>🚀 Solution Feasibility</a:t>
-            </a:r>
-          </a:p>
-          <a:p>
-            <a:r>
-              <a:rPr lang="en-IN" sz="2000" dirty="0"/>
-              <a:t>• AI-powered disease detection enables fast and accurate crop monitoring.</a:t>
-            </a:r>
-            <a:br>
-              <a:rPr lang="en-IN" sz="2000" dirty="0"/>
-            </a:br>
-            <a:r>
-              <a:rPr lang="en-IN" sz="2000" dirty="0"/>
-              <a:t>• Smartphone-based scanning makes the solution affordable and farmer-friendly.</a:t>
-            </a:r>
-            <a:br>
-              <a:rPr lang="en-IN" sz="2000" dirty="0"/>
-            </a:br>
-            <a:r>
-              <a:rPr lang="en-IN" sz="2000" dirty="0"/>
-              <a:t>• AI + IoT + weather data supports early disease prediction.</a:t>
-            </a:r>
-          </a:p>
-          <a:p>
-            <a:r>
-              <a:rPr lang="en-IN" sz="2000" b="1" dirty="0"/>
-              <a:t>⚠️ Challenges &amp; Solutions</a:t>
-            </a:r>
-          </a:p>
-          <a:p>
-            <a:r>
-              <a:rPr lang="en-IN" sz="2000" dirty="0"/>
-              <a:t>• Poor image quality → AI-based image enhancement</a:t>
-            </a:r>
-            <a:br>
-              <a:rPr lang="en-IN" sz="2000" dirty="0"/>
-            </a:br>
-            <a:r>
-              <a:rPr lang="en-IN" sz="2000" dirty="0"/>
-              <a:t>• Limited datasets → Continuous data collection &amp; training</a:t>
-            </a:r>
-            <a:br>
-              <a:rPr lang="en-IN" sz="2000" dirty="0"/>
-            </a:br>
-            <a:r>
-              <a:rPr lang="en-IN" sz="2000" dirty="0"/>
-              <a:t>• Low connectivity → Offline support system</a:t>
-            </a:r>
-            <a:br>
-              <a:rPr lang="en-IN" sz="2000" dirty="0"/>
-            </a:br>
-            <a:r>
-              <a:rPr lang="en-IN" sz="2000" dirty="0"/>
-              <a:t>• Crop variations → Adaptive AI models</a:t>
-            </a:r>
-          </a:p>
-          <a:p>
-            <a:r>
-              <a:rPr lang="en-IN" sz="2000" b="1" dirty="0"/>
-              <a:t>🌱 Future Viability</a:t>
-            </a:r>
-          </a:p>
-          <a:p>
-            <a:r>
-              <a:rPr lang="en-IN" sz="2000" dirty="0"/>
-              <a:t>• Reduces crop losses and pesticide usage.</a:t>
-            </a:r>
-            <a:br>
-              <a:rPr lang="en-IN" sz="2000" dirty="0"/>
-            </a:br>
-            <a:r>
-              <a:rPr lang="en-IN" sz="2000" dirty="0"/>
-              <a:t>• Improves farmer productivity with timely alerts.</a:t>
-            </a:r>
-            <a:br>
-              <a:rPr lang="en-IN" sz="2000" dirty="0"/>
-            </a:br>
-            <a:r>
-              <a:rPr lang="en-IN" sz="2000" dirty="0"/>
-              <a:t>• Scalable for multiple crops and regions.</a:t>
-            </a:r>
-          </a:p>
-          <a:p>
-            <a:endParaRPr lang="en-IN" sz="2000" dirty="0"/>
+            <a:pPr algn="ctr">
+              <a:spcBef>
+                <a:spcPts val="0"/>
+              </a:spcBef>
+              <a:spcAft>
+                <a:spcPts val="0"/>
+              </a:spcAft>
+              <a:buNone/>
+            </a:pPr>
+            <a:r>
+              <a:rPr lang="en-IN" sz="1700" b="1" dirty="0">
+                <a:solidFill>
+                  <a:srgbClr val="FFFFFF"/>
+                </a:solidFill>
+              </a:rPr>
+              <a:t>🚀  Solution Feasibility</a:t>
+            </a:r>
+          </a:p>
+        </p:txBody>
+      </p:sp>
+      <p:sp>
+        <p:nvSpPr>
+          <p:cNvPr id="139" name="ColHeader 139"/>
+          <p:cNvSpPr/>
+          <p:nvPr/>
+        </p:nvSpPr>
+        <p:spPr>
+          <a:xfrm>
+            <a:off x="4325000" y="1450000"/>
+            <a:ext cx="3550000" cy="560000"/>
+          </a:xfrm>
+          <a:prstGeom prst="roundRect">
+            <a:avLst>
+              <a:gd name="adj" fmla="val 25000"/>
+            </a:avLst>
+          </a:prstGeom>
+          <a:solidFill>
+            <a:srgbClr val="E65100"/>
+          </a:solidFill>
+          <a:ln>
+            <a:noFill/>
+          </a:ln>
+        </p:spPr>
+        <p:txBody>
+          <a:bodyPr wrap="square" lIns="91440" tIns="45720" rIns="91440" bIns="45720" rtlCol="0" anchor="ctr">
+            <a:noAutofit/>
+          </a:bodyPr>
+          <a:lstStyle/>
+          <a:p>
+            <a:pPr algn="ctr">
+              <a:spcBef>
+                <a:spcPts val="0"/>
+              </a:spcBef>
+              <a:spcAft>
+                <a:spcPts val="0"/>
+              </a:spcAft>
+              <a:buNone/>
+            </a:pPr>
+            <a:r>
+              <a:rPr lang="en-IN" sz="1700" b="1" dirty="0">
+                <a:solidFill>
+                  <a:srgbClr val="FFFFFF"/>
+                </a:solidFill>
+              </a:rPr>
+              <a:t>⚠️  Challenges &amp; Solutions</a:t>
+            </a:r>
+          </a:p>
+        </p:txBody>
+      </p:sp>
+      <p:sp>
+        <p:nvSpPr>
+          <p:cNvPr id="140" name="ColHeader 140"/>
+          <p:cNvSpPr/>
+          <p:nvPr/>
+        </p:nvSpPr>
+        <p:spPr>
+          <a:xfrm>
+            <a:off x="8150000" y="1450000"/>
+            <a:ext cx="3550000" cy="560000"/>
+          </a:xfrm>
+          <a:prstGeom prst="roundRect">
+            <a:avLst>
+              <a:gd name="adj" fmla="val 25000"/>
+            </a:avLst>
+          </a:prstGeom>
+          <a:solidFill>
+            <a:srgbClr val="283593"/>
+          </a:solidFill>
+          <a:ln>
+            <a:noFill/>
+          </a:ln>
+        </p:spPr>
+        <p:txBody>
+          <a:bodyPr wrap="square" lIns="91440" tIns="45720" rIns="91440" bIns="45720" rtlCol="0" anchor="ctr">
+            <a:noAutofit/>
+          </a:bodyPr>
+          <a:lstStyle/>
+          <a:p>
+            <a:pPr algn="ctr">
+              <a:spcBef>
+                <a:spcPts val="0"/>
+              </a:spcBef>
+              <a:spcAft>
+                <a:spcPts val="0"/>
+              </a:spcAft>
+              <a:buNone/>
+            </a:pPr>
+            <a:r>
+              <a:rPr lang="en-IN" sz="1700" b="1" dirty="0">
+                <a:solidFill>
+                  <a:srgbClr val="FFFFFF"/>
+                </a:solidFill>
+              </a:rPr>
+              <a:t>🌱  Future Viability</a:t>
+            </a:r>
+          </a:p>
+        </p:txBody>
+      </p:sp>
+      <p:sp>
+        <p:nvSpPr>
+          <p:cNvPr id="141" name="Card 141"/>
+          <p:cNvSpPr/>
+          <p:nvPr/>
+        </p:nvSpPr>
+        <p:spPr>
+          <a:xfrm>
+            <a:off x="500000" y="2130000"/>
+            <a:ext cx="3550000" cy="1236000"/>
+          </a:xfrm>
+          <a:prstGeom prst="roundRect">
+            <a:avLst>
+              <a:gd name="adj" fmla="val 8000"/>
+            </a:avLst>
+          </a:prstGeom>
+          <a:solidFill>
+            <a:srgbClr val="E8F5E9"/>
+          </a:solidFill>
+          <a:ln w="12700">
+            <a:solidFill>
+              <a:srgbClr val="A5D6A7"/>
+            </a:solidFill>
+          </a:ln>
+        </p:spPr>
+        <p:txBody>
+          <a:bodyPr wrap="square" lIns="180000" tIns="45720" rIns="150000" bIns="45720" rtlCol="0" anchor="ctr">
+            <a:noAutofit/>
+          </a:bodyPr>
+          <a:lstStyle/>
+          <a:p>
+            <a:pPr algn="l">
+              <a:spcBef>
+                <a:spcPts val="0"/>
+              </a:spcBef>
+              <a:spcAft>
+                <a:spcPts val="0"/>
+              </a:spcAft>
+              <a:buNone/>
+            </a:pPr>
+            <a:r>
+              <a:rPr lang="en-IN" sz="1600" b="1" dirty="0">
+                <a:solidFill>
+                  <a:srgbClr val="1B5E20"/>
+                </a:solidFill>
+              </a:rPr>
+              <a:t>AI-powered disease detection</a:t>
+            </a:r>
+            <a:r>
+              <a:rPr lang="en-IN" sz="1600" b="0" dirty="0">
+                <a:solidFill>
+                  <a:srgbClr val="2B2B2B"/>
+                </a:solidFill>
+              </a:rPr>
+              <a:t> enables fast and accurate crop monitoring.</a:t>
+            </a:r>
+          </a:p>
+        </p:txBody>
+      </p:sp>
+      <p:sp>
+        <p:nvSpPr>
+          <p:cNvPr id="142" name="Card 142"/>
+          <p:cNvSpPr/>
+          <p:nvPr/>
+        </p:nvSpPr>
+        <p:spPr>
+          <a:xfrm>
+            <a:off x="500000" y="3486000"/>
+            <a:ext cx="3550000" cy="1236000"/>
+          </a:xfrm>
+          <a:prstGeom prst="roundRect">
+            <a:avLst>
+              <a:gd name="adj" fmla="val 8000"/>
+            </a:avLst>
+          </a:prstGeom>
+          <a:solidFill>
+            <a:srgbClr val="E8F5E9"/>
+          </a:solidFill>
+          <a:ln w="12700">
+            <a:solidFill>
+              <a:srgbClr val="A5D6A7"/>
+            </a:solidFill>
+          </a:ln>
+        </p:spPr>
+        <p:txBody>
+          <a:bodyPr wrap="square" lIns="180000" tIns="45720" rIns="150000" bIns="45720" rtlCol="0" anchor="ctr">
+            <a:noAutofit/>
+          </a:bodyPr>
+          <a:lstStyle/>
+          <a:p>
+            <a:pPr algn="l">
+              <a:spcBef>
+                <a:spcPts val="0"/>
+              </a:spcBef>
+              <a:spcAft>
+                <a:spcPts val="0"/>
+              </a:spcAft>
+              <a:buNone/>
+            </a:pPr>
+            <a:r>
+              <a:rPr lang="en-IN" sz="1600" b="1" dirty="0">
+                <a:solidFill>
+                  <a:srgbClr val="1B5E20"/>
+                </a:solidFill>
+              </a:rPr>
+              <a:t>Smartphone-based scanning</a:t>
+            </a:r>
+            <a:r>
+              <a:rPr lang="en-IN" sz="1600" b="0" dirty="0">
+                <a:solidFill>
+                  <a:srgbClr val="2B2B2B"/>
+                </a:solidFill>
+              </a:rPr>
+              <a:t> makes the solution affordable and farmer-friendly.</a:t>
+            </a:r>
+          </a:p>
+        </p:txBody>
+      </p:sp>
+      <p:sp>
+        <p:nvSpPr>
+          <p:cNvPr id="143" name="Card 143"/>
+          <p:cNvSpPr/>
+          <p:nvPr/>
+        </p:nvSpPr>
+        <p:spPr>
+          <a:xfrm>
+            <a:off x="500000" y="4842000"/>
+            <a:ext cx="3550000" cy="1236000"/>
+          </a:xfrm>
+          <a:prstGeom prst="roundRect">
+            <a:avLst>
+              <a:gd name="adj" fmla="val 8000"/>
+            </a:avLst>
+          </a:prstGeom>
+          <a:solidFill>
+            <a:srgbClr val="E8F5E9"/>
+          </a:solidFill>
+          <a:ln w="12700">
+            <a:solidFill>
+              <a:srgbClr val="A5D6A7"/>
+            </a:solidFill>
+          </a:ln>
+        </p:spPr>
+        <p:txBody>
+          <a:bodyPr wrap="square" lIns="180000" tIns="45720" rIns="150000" bIns="45720" rtlCol="0" anchor="ctr">
+            <a:noAutofit/>
+          </a:bodyPr>
+          <a:lstStyle/>
+          <a:p>
+            <a:pPr algn="l">
+              <a:spcBef>
+                <a:spcPts val="0"/>
+              </a:spcBef>
+              <a:spcAft>
+                <a:spcPts val="0"/>
+              </a:spcAft>
+              <a:buNone/>
+            </a:pPr>
+            <a:r>
+              <a:rPr lang="en-IN" sz="1600" b="1" dirty="0">
+                <a:solidFill>
+                  <a:srgbClr val="1B5E20"/>
+                </a:solidFill>
+              </a:rPr>
+              <a:t>AI + IoT + weather data</a:t>
+            </a:r>
+            <a:r>
+              <a:rPr lang="en-IN" sz="1600" b="0" dirty="0">
+                <a:solidFill>
+                  <a:srgbClr val="2B2B2B"/>
+                </a:solidFill>
+              </a:rPr>
+              <a:t> supports early disease prediction.</a:t>
+            </a:r>
+          </a:p>
+        </p:txBody>
+      </p:sp>
+      <p:sp>
+        <p:nvSpPr>
+          <p:cNvPr id="144" name="Card 144"/>
+          <p:cNvSpPr/>
+          <p:nvPr/>
+        </p:nvSpPr>
+        <p:spPr>
+          <a:xfrm>
+            <a:off x="4325000" y="2130000"/>
+            <a:ext cx="3550000" cy="897000"/>
+          </a:xfrm>
+          <a:prstGeom prst="roundRect">
+            <a:avLst>
+              <a:gd name="adj" fmla="val 8000"/>
+            </a:avLst>
+          </a:prstGeom>
+          <a:solidFill>
+            <a:srgbClr val="FFF3E0"/>
+          </a:solidFill>
+          <a:ln w="12700">
+            <a:solidFill>
+              <a:srgbClr val="FFCC80"/>
+            </a:solidFill>
+          </a:ln>
+        </p:spPr>
+        <p:txBody>
+          <a:bodyPr wrap="square" lIns="180000" tIns="45720" rIns="150000" bIns="45720" rtlCol="0" anchor="ctr">
+            <a:noAutofit/>
+          </a:bodyPr>
+          <a:lstStyle/>
+          <a:p>
+            <a:pPr algn="l">
+              <a:spcBef>
+                <a:spcPts val="0"/>
+              </a:spcBef>
+              <a:spcAft>
+                <a:spcPts val="200"/>
+              </a:spcAft>
+              <a:buNone/>
+            </a:pPr>
+            <a:r>
+              <a:rPr lang="en-IN" sz="1600" b="1" dirty="0">
+                <a:solidFill>
+                  <a:srgbClr val="E65100"/>
+                </a:solidFill>
+              </a:rPr>
+              <a:t>Poor image quality</a:t>
+            </a:r>
+          </a:p>
+          <a:p>
+            <a:pPr algn="l">
+              <a:spcBef>
+                <a:spcPts val="0"/>
+              </a:spcBef>
+              <a:spcAft>
+                <a:spcPts val="0"/>
+              </a:spcAft>
+              <a:buNone/>
+            </a:pPr>
+            <a:r>
+              <a:rPr lang="en-IN" sz="1400" b="0" dirty="0">
+                <a:solidFill>
+                  <a:srgbClr val="2B2B2B"/>
+                </a:solidFill>
+              </a:rPr>
+              <a:t>→  AI-based image enhancement</a:t>
+            </a:r>
+          </a:p>
+        </p:txBody>
+      </p:sp>
+      <p:sp>
+        <p:nvSpPr>
+          <p:cNvPr id="145" name="Card 145"/>
+          <p:cNvSpPr/>
+          <p:nvPr/>
+        </p:nvSpPr>
+        <p:spPr>
+          <a:xfrm>
+            <a:off x="4325000" y="3147000"/>
+            <a:ext cx="3550000" cy="897000"/>
+          </a:xfrm>
+          <a:prstGeom prst="roundRect">
+            <a:avLst>
+              <a:gd name="adj" fmla="val 8000"/>
+            </a:avLst>
+          </a:prstGeom>
+          <a:solidFill>
+            <a:srgbClr val="FFF3E0"/>
+          </a:solidFill>
+          <a:ln w="12700">
+            <a:solidFill>
+              <a:srgbClr val="FFCC80"/>
+            </a:solidFill>
+          </a:ln>
+        </p:spPr>
+        <p:txBody>
+          <a:bodyPr wrap="square" lIns="180000" tIns="45720" rIns="150000" bIns="45720" rtlCol="0" anchor="ctr">
+            <a:noAutofit/>
+          </a:bodyPr>
+          <a:lstStyle/>
+          <a:p>
+            <a:pPr algn="l">
+              <a:spcBef>
+                <a:spcPts val="0"/>
+              </a:spcBef>
+              <a:spcAft>
+                <a:spcPts val="200"/>
+              </a:spcAft>
+              <a:buNone/>
+            </a:pPr>
+            <a:r>
+              <a:rPr lang="en-IN" sz="1600" b="1" dirty="0">
+                <a:solidFill>
+                  <a:srgbClr val="E65100"/>
+                </a:solidFill>
+              </a:rPr>
+              <a:t>Limited datasets</a:t>
+            </a:r>
+          </a:p>
+          <a:p>
+            <a:pPr algn="l">
+              <a:spcBef>
+                <a:spcPts val="0"/>
+              </a:spcBef>
+              <a:spcAft>
+                <a:spcPts val="0"/>
+              </a:spcAft>
+              <a:buNone/>
+            </a:pPr>
+            <a:r>
+              <a:rPr lang="en-IN" sz="1400" b="0" dirty="0">
+                <a:solidFill>
+                  <a:srgbClr val="2B2B2B"/>
+                </a:solidFill>
+              </a:rPr>
+              <a:t>→  Continuous data collection &amp; training</a:t>
+            </a:r>
+          </a:p>
+        </p:txBody>
+      </p:sp>
+      <p:sp>
+        <p:nvSpPr>
+          <p:cNvPr id="146" name="Card 146"/>
+          <p:cNvSpPr/>
+          <p:nvPr/>
+        </p:nvSpPr>
+        <p:spPr>
+          <a:xfrm>
+            <a:off x="4325000" y="4164000"/>
+            <a:ext cx="3550000" cy="897000"/>
+          </a:xfrm>
+          <a:prstGeom prst="roundRect">
+            <a:avLst>
+              <a:gd name="adj" fmla="val 8000"/>
+            </a:avLst>
+          </a:prstGeom>
+          <a:solidFill>
+            <a:srgbClr val="FFF3E0"/>
+          </a:solidFill>
+          <a:ln w="12700">
+            <a:solidFill>
+              <a:srgbClr val="FFCC80"/>
+            </a:solidFill>
+          </a:ln>
+        </p:spPr>
+        <p:txBody>
+          <a:bodyPr wrap="square" lIns="180000" tIns="45720" rIns="150000" bIns="45720" rtlCol="0" anchor="ctr">
+            <a:noAutofit/>
+          </a:bodyPr>
+          <a:lstStyle/>
+          <a:p>
+            <a:pPr algn="l">
+              <a:spcBef>
+                <a:spcPts val="0"/>
+              </a:spcBef>
+              <a:spcAft>
+                <a:spcPts val="200"/>
+              </a:spcAft>
+              <a:buNone/>
+            </a:pPr>
+            <a:r>
+              <a:rPr lang="en-IN" sz="1600" b="1" dirty="0">
+                <a:solidFill>
+                  <a:srgbClr val="E65100"/>
+                </a:solidFill>
+              </a:rPr>
+              <a:t>Low connectivity</a:t>
+            </a:r>
+          </a:p>
+          <a:p>
+            <a:pPr algn="l">
+              <a:spcBef>
+                <a:spcPts val="0"/>
+              </a:spcBef>
+              <a:spcAft>
+                <a:spcPts val="0"/>
+              </a:spcAft>
+              <a:buNone/>
+            </a:pPr>
+            <a:r>
+              <a:rPr lang="en-IN" sz="1400" b="0" dirty="0">
+                <a:solidFill>
+                  <a:srgbClr val="2B2B2B"/>
+                </a:solidFill>
+              </a:rPr>
+              <a:t>→  Offline support system</a:t>
+            </a:r>
+          </a:p>
+        </p:txBody>
+      </p:sp>
+      <p:sp>
+        <p:nvSpPr>
+          <p:cNvPr id="147" name="Card 147"/>
+          <p:cNvSpPr/>
+          <p:nvPr/>
+        </p:nvSpPr>
+        <p:spPr>
+          <a:xfrm>
+            <a:off x="4325000" y="5181000"/>
+            <a:ext cx="3550000" cy="897000"/>
+          </a:xfrm>
+          <a:prstGeom prst="roundRect">
+            <a:avLst>
+              <a:gd name="adj" fmla="val 8000"/>
+            </a:avLst>
+          </a:prstGeom>
+          <a:solidFill>
+            <a:srgbClr val="FFF3E0"/>
+          </a:solidFill>
+          <a:ln w="12700">
+            <a:solidFill>
+              <a:srgbClr val="FFCC80"/>
+            </a:solidFill>
+          </a:ln>
+        </p:spPr>
+        <p:txBody>
+          <a:bodyPr wrap="square" lIns="180000" tIns="45720" rIns="150000" bIns="45720" rtlCol="0" anchor="ctr">
+            <a:noAutofit/>
+          </a:bodyPr>
+          <a:lstStyle/>
+          <a:p>
+            <a:pPr algn="l">
+              <a:spcBef>
+                <a:spcPts val="0"/>
+              </a:spcBef>
+              <a:spcAft>
+                <a:spcPts val="200"/>
+              </a:spcAft>
+              <a:buNone/>
+            </a:pPr>
+            <a:r>
+              <a:rPr lang="en-IN" sz="1600" b="1" dirty="0">
+                <a:solidFill>
+                  <a:srgbClr val="E65100"/>
+                </a:solidFill>
+              </a:rPr>
+              <a:t>Crop variations</a:t>
+            </a:r>
+          </a:p>
+          <a:p>
+            <a:pPr algn="l">
+              <a:spcBef>
+                <a:spcPts val="0"/>
+              </a:spcBef>
+              <a:spcAft>
+                <a:spcPts val="0"/>
+              </a:spcAft>
+              <a:buNone/>
+            </a:pPr>
+            <a:r>
+              <a:rPr lang="en-IN" sz="1400" b="0" dirty="0">
+                <a:solidFill>
+                  <a:srgbClr val="2B2B2B"/>
+                </a:solidFill>
+              </a:rPr>
+              <a:t>→  Adaptive AI models</a:t>
+            </a:r>
+          </a:p>
+        </p:txBody>
+      </p:sp>
+      <p:sp>
+        <p:nvSpPr>
+          <p:cNvPr id="148" name="Card 148"/>
+          <p:cNvSpPr/>
+          <p:nvPr/>
+        </p:nvSpPr>
+        <p:spPr>
+          <a:xfrm>
+            <a:off x="8150000" y="2130000"/>
+            <a:ext cx="3550000" cy="1236000"/>
+          </a:xfrm>
+          <a:prstGeom prst="roundRect">
+            <a:avLst>
+              <a:gd name="adj" fmla="val 8000"/>
+            </a:avLst>
+          </a:prstGeom>
+          <a:solidFill>
+            <a:srgbClr val="E8EAF6"/>
+          </a:solidFill>
+          <a:ln w="12700">
+            <a:solidFill>
+              <a:srgbClr val="9FA8DA"/>
+            </a:solidFill>
+          </a:ln>
+        </p:spPr>
+        <p:txBody>
+          <a:bodyPr wrap="square" lIns="180000" tIns="45720" rIns="150000" bIns="45720" rtlCol="0" anchor="ctr">
+            <a:noAutofit/>
+          </a:bodyPr>
+          <a:lstStyle/>
+          <a:p>
+            <a:pPr algn="l">
+              <a:spcBef>
+                <a:spcPts val="0"/>
+              </a:spcBef>
+              <a:spcAft>
+                <a:spcPts val="0"/>
+              </a:spcAft>
+              <a:buNone/>
+            </a:pPr>
+            <a:r>
+              <a:rPr lang="en-IN" sz="1600" b="0" dirty="0">
+                <a:solidFill>
+                  <a:srgbClr val="2B2B2B"/>
+                </a:solidFill>
+              </a:rPr>
+              <a:t>Reduces </a:t>
+            </a:r>
+            <a:r>
+              <a:rPr lang="en-IN" sz="1600" b="1" dirty="0">
+                <a:solidFill>
+                  <a:srgbClr val="283593"/>
+                </a:solidFill>
+              </a:rPr>
+              <a:t>crop losses</a:t>
+            </a:r>
+            <a:r>
+              <a:rPr lang="en-IN" sz="1600" b="0" dirty="0">
+                <a:solidFill>
+                  <a:srgbClr val="2B2B2B"/>
+                </a:solidFill>
+              </a:rPr>
+              <a:t> and </a:t>
+            </a:r>
+            <a:r>
+              <a:rPr lang="en-IN" sz="1600" b="1" dirty="0">
+                <a:solidFill>
+                  <a:srgbClr val="283593"/>
+                </a:solidFill>
+              </a:rPr>
+              <a:t>pesticide usage</a:t>
+            </a:r>
+            <a:r>
+              <a:rPr lang="en-IN" sz="1600" b="0" dirty="0">
+                <a:solidFill>
+                  <a:srgbClr val="2B2B2B"/>
+                </a:solidFill>
+              </a:rPr>
+              <a:t>.</a:t>
+            </a:r>
+          </a:p>
+        </p:txBody>
+      </p:sp>
+      <p:sp>
+        <p:nvSpPr>
+          <p:cNvPr id="149" name="Card 149"/>
+          <p:cNvSpPr/>
+          <p:nvPr/>
+        </p:nvSpPr>
+        <p:spPr>
+          <a:xfrm>
+            <a:off x="8150000" y="3486000"/>
+            <a:ext cx="3550000" cy="1236000"/>
+          </a:xfrm>
+          <a:prstGeom prst="roundRect">
+            <a:avLst>
+              <a:gd name="adj" fmla="val 8000"/>
+            </a:avLst>
+          </a:prstGeom>
+          <a:solidFill>
+            <a:srgbClr val="E8EAF6"/>
+          </a:solidFill>
+          <a:ln w="12700">
+            <a:solidFill>
+              <a:srgbClr val="9FA8DA"/>
+            </a:solidFill>
+          </a:ln>
+        </p:spPr>
+        <p:txBody>
+          <a:bodyPr wrap="square" lIns="180000" tIns="45720" rIns="150000" bIns="45720" rtlCol="0" anchor="ctr">
+            <a:noAutofit/>
+          </a:bodyPr>
+          <a:lstStyle/>
+          <a:p>
+            <a:pPr algn="l">
+              <a:spcBef>
+                <a:spcPts val="0"/>
+              </a:spcBef>
+              <a:spcAft>
+                <a:spcPts val="0"/>
+              </a:spcAft>
+              <a:buNone/>
+            </a:pPr>
+            <a:r>
+              <a:rPr lang="en-IN" sz="1600" b="0" dirty="0">
+                <a:solidFill>
+                  <a:srgbClr val="2B2B2B"/>
+                </a:solidFill>
+              </a:rPr>
+              <a:t>Improves </a:t>
+            </a:r>
+            <a:r>
+              <a:rPr lang="en-IN" sz="1600" b="1" dirty="0">
+                <a:solidFill>
+                  <a:srgbClr val="283593"/>
+                </a:solidFill>
+              </a:rPr>
+              <a:t>farmer productivity</a:t>
+            </a:r>
+            <a:r>
+              <a:rPr lang="en-IN" sz="1600" b="0" dirty="0">
+                <a:solidFill>
+                  <a:srgbClr val="2B2B2B"/>
+                </a:solidFill>
+              </a:rPr>
+              <a:t> with timely alerts.</a:t>
+            </a:r>
+          </a:p>
+        </p:txBody>
+      </p:sp>
+      <p:sp>
+        <p:nvSpPr>
+          <p:cNvPr id="150" name="Card 150"/>
+          <p:cNvSpPr/>
+          <p:nvPr/>
+        </p:nvSpPr>
+        <p:spPr>
+          <a:xfrm>
+            <a:off x="8150000" y="4842000"/>
+            <a:ext cx="3550000" cy="1236000"/>
+          </a:xfrm>
+          <a:prstGeom prst="roundRect">
+            <a:avLst>
+              <a:gd name="adj" fmla="val 8000"/>
+            </a:avLst>
+          </a:prstGeom>
+          <a:solidFill>
+            <a:srgbClr val="E8EAF6"/>
+          </a:solidFill>
+          <a:ln w="12700">
+            <a:solidFill>
+              <a:srgbClr val="9FA8DA"/>
+            </a:solidFill>
+          </a:ln>
+        </p:spPr>
+        <p:txBody>
+          <a:bodyPr wrap="square" lIns="180000" tIns="45720" rIns="150000" bIns="45720" rtlCol="0" anchor="ctr">
+            <a:noAutofit/>
+          </a:bodyPr>
+          <a:lstStyle/>
+          <a:p>
+            <a:pPr algn="l">
+              <a:spcBef>
+                <a:spcPts val="0"/>
+              </a:spcBef>
+              <a:spcAft>
+                <a:spcPts val="0"/>
+              </a:spcAft>
+              <a:buNone/>
+            </a:pPr>
+            <a:r>
+              <a:rPr lang="en-IN" sz="1600" b="0" dirty="0">
+                <a:solidFill>
+                  <a:srgbClr val="2B2B2B"/>
+                </a:solidFill>
+              </a:rPr>
+              <a:t>Scalable for </a:t>
+            </a:r>
+            <a:r>
+              <a:rPr lang="en-IN" sz="1600" b="1" dirty="0">
+                <a:solidFill>
+                  <a:srgbClr val="283593"/>
+                </a:solidFill>
+              </a:rPr>
+              <a:t>multiple crops and regions</a:t>
+            </a:r>
+            <a:r>
+              <a:rPr lang="en-IN" sz="1600" b="0" dirty="0">
+                <a:solidFill>
+                  <a:srgbClr val="2B2B2B"/>
+                </a:solidFill>
+              </a:rPr>
+              <a:t>.</a:t>
+            </a:r>
           </a:p>
         </p:txBody>
       </p:sp>
@@ -7541,36 +9752,582 @@
           <a:chExt cx="0" cy="0"/>
         </a:xfrm>
       </p:grpSpPr>
-      <p:pic>
-        <p:nvPicPr>
-          <p:cNvPr id="2" name="Picture 1">
-            <a:extLst>
-              <a:ext uri="{FF2B5EF4-FFF2-40B4-BE49-F238E27FC236}">
-                <a16:creationId xmlns:a16="http://schemas.microsoft.com/office/drawing/2014/main" id="{8AFCE67E-66BB-B108-F445-5068BA906C9C}"/>
-              </a:ext>
-            </a:extLst>
-          </p:cNvPr>
-          <p:cNvPicPr>
-            <a:picLocks noChangeAspect="1"/>
-          </p:cNvPicPr>
+      <p:sp>
+        <p:nvSpPr>
+          <p:cNvPr id="11" name="Logo Oval"/>
+          <p:cNvSpPr/>
           <p:nvPr/>
-        </p:nvPicPr>
-        <p:blipFill>
-          <a:blip r:embed="rId2"/>
-          <a:stretch>
-            <a:fillRect/>
-          </a:stretch>
-        </p:blipFill>
-        <p:spPr>
-          <a:xfrm>
-            <a:off x="10445" y="0"/>
-            <a:ext cx="12171111" cy="6858000"/>
+        </p:nvSpPr>
+        <p:spPr>
+          <a:xfrm>
+            <a:off x="329773" y="252246"/>
+            <a:ext cx="1251857" cy="807334"/>
+          </a:xfrm>
+          <a:prstGeom prst="ellipse">
+            <a:avLst/>
+          </a:prstGeom>
+          <a:solidFill>
+            <a:srgbClr val="FFFFFF"/>
+          </a:solidFill>
+          <a:ln w="19050">
+            <a:solidFill>
+              <a:srgbClr val="2B3B65"/>
+            </a:solidFill>
+          </a:ln>
+        </p:spPr>
+        <p:txBody>
+          <a:bodyPr wrap="square" lIns="0" tIns="0" rIns="0" bIns="0" rtlCol="0" anchor="ctr">
+            <a:noAutofit/>
+          </a:bodyPr>
+          <a:lstStyle/>
+          <a:p>
+            <a:pPr algn="ctr">
+              <a:spcBef>
+                <a:spcPts val="0"/>
+              </a:spcBef>
+              <a:spcAft>
+                <a:spcPts val="0"/>
+              </a:spcAft>
+              <a:buNone/>
+            </a:pPr>
+            <a:r>
+              <a:rPr lang="en-IN" sz="1400" b="1" dirty="0">
+                <a:solidFill>
+                  <a:srgbClr val="262E44"/>
+                </a:solidFill>
+              </a:rPr>
+              <a:t>TECH</a:t>
+            </a:r>
+          </a:p>
+          <a:p>
+            <a:pPr algn="ctr">
+              <a:spcBef>
+                <a:spcPts val="0"/>
+              </a:spcBef>
+              <a:spcAft>
+                <a:spcPts val="0"/>
+              </a:spcAft>
+              <a:buNone/>
+            </a:pPr>
+            <a:r>
+              <a:rPr lang="en-IN" sz="1400" b="1" dirty="0">
+                <a:solidFill>
+                  <a:srgbClr val="262E44"/>
+                </a:solidFill>
+              </a:rPr>
+              <a:t>FORGE</a:t>
+            </a:r>
+          </a:p>
+        </p:txBody>
+      </p:sp>
+      <p:sp>
+        <p:nvSpPr>
+          <p:cNvPr id="12" name="Title"/>
+          <p:cNvSpPr txBox="1"/>
+          <p:nvPr/>
+        </p:nvSpPr>
+        <p:spPr>
+          <a:xfrm>
+            <a:off x="2100000" y="250000"/>
+            <a:ext cx="7600000" cy="650000"/>
           </a:xfrm>
           <a:prstGeom prst="rect">
             <a:avLst/>
           </a:prstGeom>
-        </p:spPr>
-      </p:pic>
+          <a:noFill/>
+          <a:ln>
+            <a:noFill/>
+          </a:ln>
+        </p:spPr>
+        <p:txBody>
+          <a:bodyPr wrap="square" lIns="0" tIns="0" rIns="0" bIns="0" rtlCol="0" anchor="ctr">
+            <a:noAutofit/>
+          </a:bodyPr>
+          <a:lstStyle/>
+          <a:p>
+            <a:pPr algn="ctr">
+              <a:spcBef>
+                <a:spcPts val="0"/>
+              </a:spcBef>
+              <a:spcAft>
+                <a:spcPts val="0"/>
+              </a:spcAft>
+              <a:buNone/>
+            </a:pPr>
+            <a:r>
+              <a:rPr lang="en-IN" sz="3600" b="1" dirty="0">
+                <a:latin typeface="Times New Roman"/>
+                <a:cs typeface="Times New Roman"/>
+              </a:rPr>
+              <a:t>IMPACTS AND BENEFITS</a:t>
+            </a:r>
+          </a:p>
+        </p:txBody>
+      </p:sp>
+      <p:sp>
+        <p:nvSpPr>
+          <p:cNvPr id="14" name="Card Body"/>
+          <p:cNvSpPr/>
+          <p:nvPr/>
+        </p:nvSpPr>
+        <p:spPr>
+          <a:xfrm>
+            <a:off x="500000" y="1300000"/>
+            <a:ext cx="6900000" cy="4700000"/>
+          </a:xfrm>
+          <a:prstGeom prst="rect">
+            <a:avLst/>
+          </a:prstGeom>
+          <a:solidFill>
+            <a:srgbClr val="F5F7FA"/>
+          </a:solidFill>
+          <a:ln w="12700">
+            <a:solidFill>
+              <a:srgbClr val="C7CCD6"/>
+            </a:solidFill>
+          </a:ln>
+        </p:spPr>
+        <p:txBody>
+          <a:bodyPr wrap="square" lIns="250000" tIns="820000" rIns="200000" bIns="100000" rtlCol="0" anchor="t">
+            <a:noAutofit/>
+          </a:bodyPr>
+          <a:lstStyle/>
+          <a:p>
+            <a:pPr marL="285750" indent="-285750" algn="l">
+              <a:spcBef>
+                <a:spcPts val="0"/>
+              </a:spcBef>
+              <a:spcAft>
+                <a:spcPts val="2000"/>
+              </a:spcAft>
+              <a:buClr>
+                <a:srgbClr val="2B3B65"/>
+              </a:buClr>
+              <a:buFont typeface="Arial"/>
+              <a:buChar char="•"/>
+            </a:pPr>
+            <a:r>
+              <a:rPr lang="en-IN" sz="1900" b="1" dirty="0">
+                <a:solidFill>
+                  <a:srgbClr val="2B3B65"/>
+                </a:solidFill>
+              </a:rPr>
+              <a:t>Farmer Livelihoods: </a:t>
+            </a:r>
+            <a:r>
+              <a:rPr lang="en-IN" sz="1900" b="0" dirty="0">
+                <a:solidFill>
+                  <a:srgbClr val="262E44"/>
+                </a:solidFill>
+              </a:rPr>
+              <a:t>Protects yield &amp; income from crop loss</a:t>
+            </a:r>
+          </a:p>
+          <a:p>
+            <a:pPr marL="285750" indent="-285750" algn="l">
+              <a:spcBef>
+                <a:spcPts val="0"/>
+              </a:spcBef>
+              <a:spcAft>
+                <a:spcPts val="2000"/>
+              </a:spcAft>
+              <a:buClr>
+                <a:srgbClr val="2B3B65"/>
+              </a:buClr>
+              <a:buFont typeface="Arial"/>
+              <a:buChar char="•"/>
+            </a:pPr>
+            <a:r>
+              <a:rPr lang="en-IN" sz="1900" b="1" dirty="0">
+                <a:solidFill>
+                  <a:srgbClr val="2B3B65"/>
+                </a:solidFill>
+              </a:rPr>
+              <a:t>Farmer Empowerment: </a:t>
+            </a:r>
+            <a:r>
+              <a:rPr lang="en-IN" sz="1900" b="0" dirty="0">
+                <a:solidFill>
+                  <a:srgbClr val="262E44"/>
+                </a:solidFill>
+              </a:rPr>
+              <a:t>Expert diagnosis in every pocket</a:t>
+            </a:r>
+          </a:p>
+          <a:p>
+            <a:pPr marL="285750" indent="-285750" algn="l">
+              <a:spcBef>
+                <a:spcPts val="0"/>
+              </a:spcBef>
+              <a:spcAft>
+                <a:spcPts val="2000"/>
+              </a:spcAft>
+              <a:buClr>
+                <a:srgbClr val="2B3B65"/>
+              </a:buClr>
+              <a:buFont typeface="Arial"/>
+              <a:buChar char="•"/>
+            </a:pPr>
+            <a:r>
+              <a:rPr lang="en-IN" sz="1900" b="1" dirty="0">
+                <a:solidFill>
+                  <a:srgbClr val="2B3B65"/>
+                </a:solidFill>
+              </a:rPr>
+              <a:t>Economic Value: </a:t>
+            </a:r>
+            <a:r>
+              <a:rPr lang="en-IN" sz="1900" b="0" dirty="0">
+                <a:solidFill>
+                  <a:srgbClr val="262E44"/>
+                </a:solidFill>
+              </a:rPr>
+              <a:t>Cuts crop-loss burden &amp; pesticide spend</a:t>
+            </a:r>
+          </a:p>
+          <a:p>
+            <a:pPr marL="285750" indent="-285750" algn="l">
+              <a:spcBef>
+                <a:spcPts val="0"/>
+              </a:spcBef>
+              <a:spcAft>
+                <a:spcPts val="2000"/>
+              </a:spcAft>
+              <a:buClr>
+                <a:srgbClr val="2B3B65"/>
+              </a:buClr>
+              <a:buFont typeface="Arial"/>
+              <a:buChar char="•"/>
+            </a:pPr>
+            <a:r>
+              <a:rPr lang="en-IN" sz="1900" b="1" dirty="0">
+                <a:solidFill>
+                  <a:srgbClr val="2B3B65"/>
+                </a:solidFill>
+              </a:rPr>
+              <a:t>Policy &amp; Governance: </a:t>
+            </a:r>
+            <a:r>
+              <a:rPr lang="en-IN" sz="1900" b="0" dirty="0">
+                <a:solidFill>
+                  <a:srgbClr val="262E44"/>
+                </a:solidFill>
+              </a:rPr>
+              <a:t>Data-backed insight for targeted support</a:t>
+            </a:r>
+          </a:p>
+          <a:p>
+            <a:pPr marL="285750" indent="-285750" algn="l">
+              <a:spcBef>
+                <a:spcPts val="0"/>
+              </a:spcBef>
+              <a:spcAft>
+                <a:spcPts val="2000"/>
+              </a:spcAft>
+              <a:buClr>
+                <a:srgbClr val="2B3B65"/>
+              </a:buClr>
+              <a:buFont typeface="Arial"/>
+              <a:buChar char="•"/>
+            </a:pPr>
+            <a:r>
+              <a:rPr lang="en-IN" sz="1900" b="1" dirty="0">
+                <a:solidFill>
+                  <a:srgbClr val="2B3B65"/>
+                </a:solidFill>
+              </a:rPr>
+              <a:t>Environmental Gain: </a:t>
+            </a:r>
+            <a:r>
+              <a:rPr lang="en-IN" sz="1900" b="0" dirty="0">
+                <a:solidFill>
+                  <a:srgbClr val="262E44"/>
+                </a:solidFill>
+              </a:rPr>
+              <a:t>Less blanket spraying, less runoff</a:t>
+            </a:r>
+          </a:p>
+          <a:p>
+            <a:pPr marL="285750" indent="-285750" algn="l">
+              <a:spcBef>
+                <a:spcPts val="0"/>
+              </a:spcBef>
+              <a:spcAft>
+                <a:spcPts val="2000"/>
+              </a:spcAft>
+              <a:buClr>
+                <a:srgbClr val="2B3B65"/>
+              </a:buClr>
+              <a:buFont typeface="Arial"/>
+              <a:buChar char="•"/>
+            </a:pPr>
+            <a:r>
+              <a:rPr lang="en-IN" sz="1900" b="1" dirty="0">
+                <a:solidFill>
+                  <a:srgbClr val="2B3B65"/>
+                </a:solidFill>
+              </a:rPr>
+              <a:t>Food Security: </a:t>
+            </a:r>
+            <a:r>
+              <a:rPr lang="en-IN" sz="1900" b="0" dirty="0">
+                <a:solidFill>
+                  <a:srgbClr val="262E44"/>
+                </a:solidFill>
+              </a:rPr>
+              <a:t>Steadies local food supply &amp; prices</a:t>
+            </a:r>
+          </a:p>
+        </p:txBody>
+      </p:sp>
+      <p:sp>
+        <p:nvSpPr>
+          <p:cNvPr id="15" name="Card Header"/>
+          <p:cNvSpPr/>
+          <p:nvPr/>
+        </p:nvSpPr>
+        <p:spPr>
+          <a:xfrm>
+            <a:off x="500000" y="1300000"/>
+            <a:ext cx="6900000" cy="560000"/>
+          </a:xfrm>
+          <a:prstGeom prst="rect">
+            <a:avLst/>
+          </a:prstGeom>
+          <a:solidFill>
+            <a:srgbClr val="2B3B65"/>
+          </a:solidFill>
+          <a:ln>
+            <a:noFill/>
+          </a:ln>
+        </p:spPr>
+        <p:txBody>
+          <a:bodyPr wrap="square" lIns="250000" tIns="0" rIns="200000" bIns="0" rtlCol="0" anchor="ctr">
+            <a:noAutofit/>
+          </a:bodyPr>
+          <a:lstStyle/>
+          <a:p>
+            <a:pPr algn="l">
+              <a:spcBef>
+                <a:spcPts val="0"/>
+              </a:spcBef>
+              <a:spcAft>
+                <a:spcPts val="0"/>
+              </a:spcAft>
+              <a:buNone/>
+            </a:pPr>
+            <a:r>
+              <a:rPr lang="en-IN" sz="2200" b="1" dirty="0">
+                <a:solidFill>
+                  <a:srgbClr val="FFFFFF"/>
+                </a:solidFill>
+              </a:rPr>
+              <a:t>AgriShield AI - Key Benefits</a:t>
+            </a:r>
+          </a:p>
+        </p:txBody>
+      </p:sp>
+      <p:sp>
+        <p:nvSpPr>
+          <p:cNvPr id="16" name="Card Body"/>
+          <p:cNvSpPr/>
+          <p:nvPr/>
+        </p:nvSpPr>
+        <p:spPr>
+          <a:xfrm>
+            <a:off x="7592000" y="1300000"/>
+            <a:ext cx="4100000" cy="4700000"/>
+          </a:xfrm>
+          <a:prstGeom prst="rect">
+            <a:avLst/>
+          </a:prstGeom>
+          <a:solidFill>
+            <a:srgbClr val="F5F7FA"/>
+          </a:solidFill>
+          <a:ln w="12700">
+            <a:solidFill>
+              <a:srgbClr val="C7CCD6"/>
+            </a:solidFill>
+          </a:ln>
+        </p:spPr>
+        <p:txBody>
+          <a:bodyPr wrap="square" lIns="250000" tIns="820000" rIns="200000" bIns="100000" rtlCol="0" anchor="t">
+            <a:noAutofit/>
+          </a:bodyPr>
+          <a:lstStyle/>
+          <a:p>
+            <a:pPr marL="285750" indent="-285750" algn="l">
+              <a:spcBef>
+                <a:spcPts val="0"/>
+              </a:spcBef>
+              <a:spcAft>
+                <a:spcPts val="2000"/>
+              </a:spcAft>
+              <a:buClr>
+                <a:srgbClr val="2B3B65"/>
+              </a:buClr>
+              <a:buFont typeface="Arial"/>
+              <a:buChar char="•"/>
+            </a:pPr>
+            <a:r>
+              <a:rPr lang="en-IN" sz="1900" b="1" dirty="0">
+                <a:solidFill>
+                  <a:srgbClr val="2B3B65"/>
+                </a:solidFill>
+              </a:rPr>
+              <a:t>Early: </a:t>
+            </a:r>
+            <a:r>
+              <a:rPr lang="en-IN" sz="1900" b="0" dirty="0">
+                <a:solidFill>
+                  <a:srgbClr val="262E44"/>
+                </a:solidFill>
+              </a:rPr>
+              <a:t>Advance warning before crop damage</a:t>
+            </a:r>
+          </a:p>
+          <a:p>
+            <a:pPr marL="285750" indent="-285750" algn="l">
+              <a:spcBef>
+                <a:spcPts val="0"/>
+              </a:spcBef>
+              <a:spcAft>
+                <a:spcPts val="2000"/>
+              </a:spcAft>
+              <a:buClr>
+                <a:srgbClr val="2B3B65"/>
+              </a:buClr>
+              <a:buFont typeface="Arial"/>
+              <a:buChar char="•"/>
+            </a:pPr>
+            <a:r>
+              <a:rPr lang="en-IN" sz="1900" b="1" dirty="0">
+                <a:solidFill>
+                  <a:srgbClr val="2B3B65"/>
+                </a:solidFill>
+              </a:rPr>
+              <a:t>Fewer: </a:t>
+            </a:r>
+            <a:r>
+              <a:rPr lang="en-IN" sz="1900" b="0" dirty="0">
+                <a:solidFill>
+                  <a:srgbClr val="262E44"/>
+                </a:solidFill>
+              </a:rPr>
+              <a:t>Unneeded pesticide sprays avoided</a:t>
+            </a:r>
+          </a:p>
+          <a:p>
+            <a:pPr marL="285750" indent="-285750" algn="l">
+              <a:spcBef>
+                <a:spcPts val="0"/>
+              </a:spcBef>
+              <a:spcAft>
+                <a:spcPts val="2000"/>
+              </a:spcAft>
+              <a:buClr>
+                <a:srgbClr val="2B3B65"/>
+              </a:buClr>
+              <a:buFont typeface="Arial"/>
+              <a:buChar char="•"/>
+            </a:pPr>
+            <a:r>
+              <a:rPr lang="en-IN" sz="1900" b="1" dirty="0">
+                <a:solidFill>
+                  <a:srgbClr val="2B3B65"/>
+                </a:solidFill>
+              </a:rPr>
+              <a:t>Higher: </a:t>
+            </a:r>
+            <a:r>
+              <a:rPr lang="en-IN" sz="1900" b="0" dirty="0">
+                <a:solidFill>
+                  <a:srgbClr val="262E44"/>
+                </a:solidFill>
+              </a:rPr>
+              <a:t>Protected yield &amp; farmer income</a:t>
+            </a:r>
+          </a:p>
+          <a:p>
+            <a:pPr marL="285750" indent="-285750" algn="l">
+              <a:spcBef>
+                <a:spcPts val="0"/>
+              </a:spcBef>
+              <a:spcAft>
+                <a:spcPts val="2000"/>
+              </a:spcAft>
+              <a:buClr>
+                <a:srgbClr val="2B3B65"/>
+              </a:buClr>
+              <a:buFont typeface="Arial"/>
+              <a:buChar char="•"/>
+            </a:pPr>
+            <a:r>
+              <a:rPr lang="en-IN" sz="1900" b="1" dirty="0">
+                <a:solidFill>
+                  <a:srgbClr val="2B3B65"/>
+                </a:solidFill>
+              </a:rPr>
+              <a:t>Wider: </a:t>
+            </a:r>
+            <a:r>
+              <a:rPr lang="en-IN" sz="1900" b="0" dirty="0">
+                <a:solidFill>
+                  <a:srgbClr val="262E44"/>
+                </a:solidFill>
+              </a:rPr>
+              <a:t>Reach across farming communities</a:t>
+            </a:r>
+          </a:p>
+        </p:txBody>
+      </p:sp>
+      <p:sp>
+        <p:nvSpPr>
+          <p:cNvPr id="17" name="Card Header"/>
+          <p:cNvSpPr/>
+          <p:nvPr/>
+        </p:nvSpPr>
+        <p:spPr>
+          <a:xfrm>
+            <a:off x="7592000" y="1300000"/>
+            <a:ext cx="4100000" cy="560000"/>
+          </a:xfrm>
+          <a:prstGeom prst="rect">
+            <a:avLst/>
+          </a:prstGeom>
+          <a:solidFill>
+            <a:srgbClr val="2B3B65"/>
+          </a:solidFill>
+          <a:ln>
+            <a:noFill/>
+          </a:ln>
+        </p:spPr>
+        <p:txBody>
+          <a:bodyPr wrap="square" lIns="250000" tIns="0" rIns="200000" bIns="0" rtlCol="0" anchor="ctr">
+            <a:noAutofit/>
+          </a:bodyPr>
+          <a:lstStyle/>
+          <a:p>
+            <a:pPr algn="l">
+              <a:spcBef>
+                <a:spcPts val="0"/>
+              </a:spcBef>
+              <a:spcAft>
+                <a:spcPts val="0"/>
+              </a:spcAft>
+              <a:buNone/>
+            </a:pPr>
+            <a:r>
+              <a:rPr lang="en-IN" sz="2200" b="1" dirty="0">
+                <a:solidFill>
+                  <a:srgbClr val="FFFFFF"/>
+                </a:solidFill>
+              </a:rPr>
+              <a:t>Overall Impact</a:t>
+            </a:r>
+          </a:p>
+        </p:txBody>
+      </p:sp>
       <p:pic>
         <p:nvPicPr>
           <p:cNvPr id="3" name="Picture 2">
@@ -7586,7 +10343,7 @@
           <p:nvPr/>
         </p:nvPicPr>
         <p:blipFill>
-          <a:blip r:embed="rId3"/>
+          <a:blip r:embed="rId2"/>
           <a:stretch>
             <a:fillRect/>
           </a:stretch>
@@ -7914,11 +10671,13 @@
             <a:avLst/>
           </a:prstGeom>
           <a:solidFill>
-            <a:srgbClr val="FFFFFF"/>
+            <a:schemeClr val="bg1">
+              <a:lumMod val="95000"/>
+            </a:schemeClr>
           </a:solidFill>
           <a:ln>
             <a:solidFill>
-              <a:srgbClr val="D2DCE6"/>
+              <a:srgbClr val="00B050"/>
             </a:solidFill>
           </a:ln>
         </p:spPr>
@@ -8109,11 +10868,13 @@
             <a:avLst/>
           </a:prstGeom>
           <a:solidFill>
-            <a:srgbClr val="FFFFFF"/>
+            <a:schemeClr val="bg1">
+              <a:lumMod val="95000"/>
+            </a:schemeClr>
           </a:solidFill>
           <a:ln>
             <a:solidFill>
-              <a:srgbClr val="D2DCE6"/>
+              <a:srgbClr val="00B050"/>
             </a:solidFill>
           </a:ln>
         </p:spPr>
